--- a/assets/figures-editable/c1-c2/c1-e24.pptx
+++ b/assets/figures-editable/c1-c2/c1-e24.pptx
@@ -7,7 +7,7 @@
   <p:sldIdLst>
     <p:sldId id="256" r:id="rId7"/>
   </p:sldIdLst>
-  <p:sldSz cx="11948160" cy="7924799" type="screen4x3"/>
+  <p:sldSz cx="12191695" cy="6858000" type="screen4x3"/>
   <p:notesSz cx="6858000" cy="9144000"/>
   <p:defaultTextStyle>
     <a:defPPr>
@@ -3098,14 +3098,14 @@
       <p:grpSpPr/>
       <p:sp>
         <p:nvSpPr>
-          <p:cNvPr id="2" name="text1" descr="sci-ppt:C1-E24-001"/>
+          <p:cNvPr id="2" name="C1-E24 text 0" descr="sci-ppt:o000"/>
           <p:cNvSpPr txBox="1"/>
           <p:nvPr/>
         </p:nvSpPr>
         <p:spPr>
           <a:xfrm>
-            <a:off x="316992" y="268224"/>
-            <a:ext cx="11277600" cy="359054"/>
+            <a:off x="274320" y="118872"/>
+            <a:ext cx="11612880" cy="340105"/>
           </a:xfrm>
           <a:prstGeom prst="rect">
             <a:avLst/>
@@ -3114,7 +3114,7 @@
           <a:effectLst/>
         </p:spPr>
         <p:txBody>
-          <a:bodyPr wrap="none" lIns="27432" rIns="27432" tIns="18288" bIns="18288" anchor="ctr">
+          <a:bodyPr wrap="none" lIns="18288" rIns="18288" tIns="18288" bIns="18288" anchor="t">
             <a:spAutoFit/>
           </a:bodyPr>
           <a:lstStyle/>
@@ -3125,35 +3125,67 @@
               </a:spcAft>
             </a:pPr>
             <a:r>
-              <a:rPr sz="1823" b="0" i="0">
+              <a:rPr sz="1900" b="1" i="0">
                 <a:solidFill>
                   <a:srgbClr val="8EDBD4"/>
                 </a:solidFill>
                 <a:latin typeface="Arial"/>
               </a:rPr>
-              <a:t>C1-E24 | Physical-variable diagram</a:t>
-            </a:r>
-          </a:p>
-        </p:txBody>
-      </p:sp>
-      <p:sp>
-        <p:nvSpPr>
-          <p:cNvPr id="3" name="rect2" descr="sci-ppt:C1-E24-002"/>
+              <a:t>C1-E24 · Exact straight-column solution of the reduced model</a:t>
+            </a:r>
+          </a:p>
+        </p:txBody>
+      </p:sp>
+      <p:sp>
+        <p:nvSpPr>
+          <p:cNvPr id="3" name="C1-E24 rect 1" descr="sci-ppt:o001"/>
           <p:cNvSpPr/>
           <p:nvPr/>
         </p:nvSpPr>
         <p:spPr>
           <a:xfrm>
-            <a:off x="1219200" y="2194560"/>
-            <a:ext cx="8290560" cy="1463040"/>
+            <a:off x="1188720" y="1417319"/>
+            <a:ext cx="6400800" cy="640080"/>
           </a:xfrm>
           <a:prstGeom prst="rect">
             <a:avLst/>
           </a:prstGeom>
           <a:solidFill>
-            <a:srgbClr val="213E4B"/>
+            <a:srgbClr val="1E4A5A"/>
           </a:solidFill>
           <a:ln w="19050">
+            <a:solidFill>
+              <a:srgbClr val="2B6678"/>
+            </a:solidFill>
+          </a:ln>
+          <a:effectLst/>
+        </p:spPr>
+        <p:txBody>
+          <a:bodyPr rtlCol="0" anchor="ctr"/>
+          <a:lstStyle/>
+          <a:p>
+            <a:pPr algn="ctr"/>
+          </a:p>
+        </p:txBody>
+      </p:sp>
+      <p:sp>
+        <p:nvSpPr>
+          <p:cNvPr id="4" name="C1-E24 rect 2" descr="sci-ppt:o002"/>
+          <p:cNvSpPr/>
+          <p:nvPr/>
+        </p:nvSpPr>
+        <p:spPr>
+          <a:xfrm>
+            <a:off x="1005840" y="1325880"/>
+            <a:ext cx="182880" cy="822960"/>
+          </a:xfrm>
+          <a:prstGeom prst="rect">
+            <a:avLst/>
+          </a:prstGeom>
+          <a:solidFill>
+            <a:srgbClr val="3A5362"/>
+          </a:solidFill>
+          <a:ln w="16510">
             <a:solidFill>
               <a:srgbClr val="B4C7D2"/>
             </a:solidFill>
@@ -3168,65 +3200,101 @@
           </a:p>
         </p:txBody>
       </p:sp>
+      <p:sp>
+        <p:nvSpPr>
+          <p:cNvPr id="5" name="C1-E24 text 3" descr="sci-ppt:o003"/>
+          <p:cNvSpPr txBox="1"/>
+          <p:nvPr/>
+        </p:nvSpPr>
+        <p:spPr>
+          <a:xfrm>
+            <a:off x="731520" y="868680"/>
+            <a:ext cx="2194560" cy="223900"/>
+          </a:xfrm>
+          <a:prstGeom prst="rect">
+            <a:avLst/>
+          </a:prstGeom>
+          <a:noFill/>
+          <a:effectLst/>
+        </p:spPr>
+        <p:txBody>
+          <a:bodyPr wrap="none" lIns="18288" rIns="18288" tIns="18288" bIns="18288" anchor="t">
+            <a:spAutoFit/>
+          </a:bodyPr>
+          <a:lstStyle/>
+          <a:p>
+            <a:pPr algn="l">
+              <a:spcAft>
+                <a:spcPts val="0"/>
+              </a:spcAft>
+            </a:pPr>
+            <a:r>
+              <a:rPr sz="1150" b="1" i="0">
+                <a:solidFill>
+                  <a:srgbClr val="F2B880"/>
+                </a:solidFill>
+                <a:latin typeface="Arial"/>
+              </a:rPr>
+              <a:t>driven end z = 0</a:t>
+            </a:r>
+          </a:p>
+        </p:txBody>
+      </p:sp>
+      <p:sp>
+        <p:nvSpPr>
+          <p:cNvPr id="6" name="C1-E24 text 4" descr="sci-ppt:o004"/>
+          <p:cNvSpPr txBox="1"/>
+          <p:nvPr/>
+        </p:nvSpPr>
+        <p:spPr>
+          <a:xfrm>
+            <a:off x="6126480" y="868680"/>
+            <a:ext cx="2377440" cy="223900"/>
+          </a:xfrm>
+          <a:prstGeom prst="rect">
+            <a:avLst/>
+          </a:prstGeom>
+          <a:noFill/>
+          <a:effectLst/>
+        </p:spPr>
+        <p:txBody>
+          <a:bodyPr wrap="none" lIns="18288" rIns="18288" tIns="18288" bIns="18288" anchor="t">
+            <a:spAutoFit/>
+          </a:bodyPr>
+          <a:lstStyle/>
+          <a:p>
+            <a:pPr algn="l">
+              <a:spcAft>
+                <a:spcPts val="0"/>
+              </a:spcAft>
+            </a:pPr>
+            <a:r>
+              <a:rPr sz="1150" b="1" i="0">
+                <a:solidFill>
+                  <a:srgbClr val="8EDBD4"/>
+                </a:solidFill>
+                <a:latin typeface="Arial"/>
+              </a:rPr>
+              <a:t>outlet z = L</a:t>
+            </a:r>
+          </a:p>
+        </p:txBody>
+      </p:sp>
       <p:cxnSp>
         <p:nvCxnSpPr>
-          <p:cNvPr id="4" name="line3" descr="sci-ppt:C1-E24-003"/>
+          <p:cNvPr id="7" name="C1-E24 arrow 5" descr="sci-ppt:o005"/>
           <p:cNvCxnSpPr/>
           <p:nvPr/>
         </p:nvCxnSpPr>
         <p:spPr>
           <a:xfrm>
-            <a:off x="1219200" y="2194560"/>
-            <a:ext cx="8290560" cy="0"/>
+            <a:off x="1737360" y="1737360"/>
+            <a:ext cx="822960" cy="0"/>
           </a:xfrm>
           <a:prstGeom prst="line">
             <a:avLst/>
           </a:prstGeom>
-          <a:ln w="25400">
-            <a:solidFill>
-              <a:srgbClr val="B4C7D2"/>
-            </a:solidFill>
-          </a:ln>
-          <a:effectLst/>
-        </p:spPr>
-      </p:cxnSp>
-      <p:cxnSp>
-        <p:nvCxnSpPr>
-          <p:cNvPr id="5" name="line4" descr="sci-ppt:C1-E24-004"/>
-          <p:cNvCxnSpPr/>
-          <p:nvPr/>
-        </p:nvCxnSpPr>
-        <p:spPr>
-          <a:xfrm>
-            <a:off x="1219200" y="3657600"/>
-            <a:ext cx="8290560" cy="0"/>
-          </a:xfrm>
-          <a:prstGeom prst="line">
-            <a:avLst/>
-          </a:prstGeom>
-          <a:ln w="25400">
-            <a:solidFill>
-              <a:srgbClr val="B4C7D2"/>
-            </a:solidFill>
-          </a:ln>
-          <a:effectLst/>
-        </p:spPr>
-      </p:cxnSp>
-      <p:cxnSp>
-        <p:nvCxnSpPr>
-          <p:cNvPr id="6" name="arrow5" descr="sci-ppt:C1-E24-005"/>
-          <p:cNvCxnSpPr/>
-          <p:nvPr/>
-        </p:nvCxnSpPr>
-        <p:spPr>
-          <a:xfrm>
-            <a:off x="2316480" y="2926080"/>
-            <a:ext cx="5608319" cy="0"/>
-          </a:xfrm>
-          <a:prstGeom prst="line">
-            <a:avLst/>
-          </a:prstGeom>
-          <a:ln w="25400">
+          <a:ln w="38100">
             <a:solidFill>
               <a:srgbClr val="8EDBD4"/>
             </a:solidFill>
@@ -3236,16 +3304,154 @@
           <a:effectLst/>
         </p:spPr>
       </p:cxnSp>
-      <p:sp>
-        <p:nvSpPr>
-          <p:cNvPr id="7" name="text6" descr="sci-ppt:C1-E24-006"/>
+      <p:cxnSp>
+        <p:nvCxnSpPr>
+          <p:cNvPr id="8" name="C1-E24 arrow 6" descr="sci-ppt:o006"/>
+          <p:cNvCxnSpPr/>
+          <p:nvPr/>
+        </p:nvCxnSpPr>
+        <p:spPr>
+          <a:xfrm>
+            <a:off x="3017520" y="1737360"/>
+            <a:ext cx="822960" cy="0"/>
+          </a:xfrm>
+          <a:prstGeom prst="line">
+            <a:avLst/>
+          </a:prstGeom>
+          <a:ln w="38100">
+            <a:solidFill>
+              <a:srgbClr val="8EDBD4"/>
+            </a:solidFill>
+            <a:headEnd type="none" w="med" len="med"/>
+            <a:tailEnd type="triangle" w="med" len="med"/>
+          </a:ln>
+          <a:effectLst/>
+        </p:spPr>
+      </p:cxnSp>
+      <p:cxnSp>
+        <p:nvCxnSpPr>
+          <p:cNvPr id="9" name="C1-E24 arrow 7" descr="sci-ppt:o007"/>
+          <p:cNvCxnSpPr/>
+          <p:nvPr/>
+        </p:nvCxnSpPr>
+        <p:spPr>
+          <a:xfrm>
+            <a:off x="4297679" y="1737360"/>
+            <a:ext cx="822961" cy="0"/>
+          </a:xfrm>
+          <a:prstGeom prst="line">
+            <a:avLst/>
+          </a:prstGeom>
+          <a:ln w="38100">
+            <a:solidFill>
+              <a:srgbClr val="8EDBD4"/>
+            </a:solidFill>
+            <a:headEnd type="none" w="med" len="med"/>
+            <a:tailEnd type="triangle" w="med" len="med"/>
+          </a:ln>
+          <a:effectLst/>
+        </p:spPr>
+      </p:cxnSp>
+      <p:cxnSp>
+        <p:nvCxnSpPr>
+          <p:cNvPr id="10" name="C1-E24 arrow 8" descr="sci-ppt:o008"/>
+          <p:cNvCxnSpPr/>
+          <p:nvPr/>
+        </p:nvCxnSpPr>
+        <p:spPr>
+          <a:xfrm>
+            <a:off x="5577840" y="1737360"/>
+            <a:ext cx="822960" cy="0"/>
+          </a:xfrm>
+          <a:prstGeom prst="line">
+            <a:avLst/>
+          </a:prstGeom>
+          <a:ln w="38100">
+            <a:solidFill>
+              <a:srgbClr val="8EDBD4"/>
+            </a:solidFill>
+            <a:headEnd type="none" w="med" len="med"/>
+            <a:tailEnd type="triangle" w="med" len="med"/>
+          </a:ln>
+          <a:effectLst/>
+        </p:spPr>
+      </p:cxnSp>
+      <p:cxnSp>
+        <p:nvCxnSpPr>
+          <p:cNvPr id="11" name="C1-E24 line 9" descr="sci-ppt:o009"/>
+          <p:cNvCxnSpPr/>
+          <p:nvPr/>
+        </p:nvCxnSpPr>
+        <p:spPr>
+          <a:xfrm>
+            <a:off x="1188720" y="2240280"/>
+            <a:ext cx="6400800" cy="0"/>
+          </a:xfrm>
+          <a:prstGeom prst="line">
+            <a:avLst/>
+          </a:prstGeom>
+          <a:ln w="16510">
+            <a:solidFill>
+              <a:srgbClr val="B4C7D2"/>
+            </a:solidFill>
+          </a:ln>
+          <a:effectLst/>
+        </p:spPr>
+      </p:cxnSp>
+      <p:cxnSp>
+        <p:nvCxnSpPr>
+          <p:cNvPr id="12" name="C1-E24 line 10" descr="sci-ppt:o010"/>
+          <p:cNvCxnSpPr/>
+          <p:nvPr/>
+        </p:nvCxnSpPr>
+        <p:spPr>
+          <a:xfrm>
+            <a:off x="1188720" y="2176272"/>
+            <a:ext cx="0" cy="128016"/>
+          </a:xfrm>
+          <a:prstGeom prst="line">
+            <a:avLst/>
+          </a:prstGeom>
+          <a:ln w="16510">
+            <a:solidFill>
+              <a:srgbClr val="B4C7D2"/>
+            </a:solidFill>
+          </a:ln>
+          <a:effectLst/>
+        </p:spPr>
+      </p:cxnSp>
+      <p:cxnSp>
+        <p:nvCxnSpPr>
+          <p:cNvPr id="13" name="C1-E24 line 11" descr="sci-ppt:o011"/>
+          <p:cNvCxnSpPr/>
+          <p:nvPr/>
+        </p:nvCxnSpPr>
+        <p:spPr>
+          <a:xfrm>
+            <a:off x="7589520" y="2176272"/>
+            <a:ext cx="0" cy="128016"/>
+          </a:xfrm>
+          <a:prstGeom prst="line">
+            <a:avLst/>
+          </a:prstGeom>
+          <a:ln w="16510">
+            <a:solidFill>
+              <a:srgbClr val="B4C7D2"/>
+            </a:solidFill>
+          </a:ln>
+          <a:effectLst/>
+        </p:spPr>
+      </p:cxnSp>
+      <p:sp>
+        <p:nvSpPr>
+          <p:cNvPr id="14" name="C1-E24 text 12" descr="sci-ppt:o012"/>
           <p:cNvSpPr txBox="1"/>
           <p:nvPr/>
         </p:nvSpPr>
         <p:spPr>
           <a:xfrm>
-            <a:off x="1402080" y="1463040"/>
-            <a:ext cx="3657600" cy="377952"/>
+            <a:off x="3474720" y="2317242"/>
+            <a:ext cx="1828800" cy="223900"/>
           </a:xfrm>
           <a:prstGeom prst="rect">
             <a:avLst/>
@@ -3254,7 +3460,741 @@
           <a:effectLst/>
         </p:spPr>
         <p:txBody>
-          <a:bodyPr wrap="none" lIns="27432" rIns="27432" tIns="18288" bIns="18288" anchor="ctr">
+          <a:bodyPr wrap="none" lIns="18288" rIns="18288" tIns="18288" bIns="18288" anchor="t">
+            <a:spAutoFit/>
+          </a:bodyPr>
+          <a:lstStyle/>
+          <a:p>
+            <a:pPr algn="ctr">
+              <a:spcAft>
+                <a:spcPts val="0"/>
+              </a:spcAft>
+            </a:pPr>
+            <a:r>
+              <a:rPr sz="1150" b="0" i="0">
+                <a:solidFill>
+                  <a:srgbClr val="B4C7D2"/>
+                </a:solidFill>
+                <a:latin typeface="Arial"/>
+              </a:rPr>
+              <a:t>L = 100 µm</a:t>
+            </a:r>
+          </a:p>
+        </p:txBody>
+      </p:sp>
+      <p:cxnSp>
+        <p:nvCxnSpPr>
+          <p:cNvPr id="15" name="C1-E24 line 13" descr="sci-ppt:o013"/>
+          <p:cNvCxnSpPr/>
+          <p:nvPr/>
+        </p:nvCxnSpPr>
+        <p:spPr>
+          <a:xfrm>
+            <a:off x="1188720" y="5029200"/>
+            <a:ext cx="6400800" cy="0"/>
+          </a:xfrm>
+          <a:prstGeom prst="line">
+            <a:avLst/>
+          </a:prstGeom>
+          <a:ln w="19050">
+            <a:solidFill>
+              <a:srgbClr val="B4C7D2"/>
+            </a:solidFill>
+          </a:ln>
+          <a:effectLst/>
+        </p:spPr>
+      </p:cxnSp>
+      <p:cxnSp>
+        <p:nvCxnSpPr>
+          <p:cNvPr id="16" name="C1-E24 line 14" descr="sci-ppt:o014"/>
+          <p:cNvCxnSpPr/>
+          <p:nvPr/>
+        </p:nvCxnSpPr>
+        <p:spPr>
+          <a:xfrm>
+            <a:off x="1188720" y="2743200"/>
+            <a:ext cx="0" cy="2286000"/>
+          </a:xfrm>
+          <a:prstGeom prst="line">
+            <a:avLst/>
+          </a:prstGeom>
+          <a:ln w="19050">
+            <a:solidFill>
+              <a:srgbClr val="B4C7D2"/>
+            </a:solidFill>
+          </a:ln>
+          <a:effectLst/>
+        </p:spPr>
+      </p:cxnSp>
+      <p:cxnSp>
+        <p:nvCxnSpPr>
+          <p:cNvPr id="17" name="C1-E24 line 15" descr="sci-ppt:o015"/>
+          <p:cNvCxnSpPr/>
+          <p:nvPr/>
+        </p:nvCxnSpPr>
+        <p:spPr>
+          <a:xfrm>
+            <a:off x="1188720" y="5029200"/>
+            <a:ext cx="0" cy="64008"/>
+          </a:xfrm>
+          <a:prstGeom prst="line">
+            <a:avLst/>
+          </a:prstGeom>
+          <a:ln w="12700">
+            <a:solidFill>
+              <a:srgbClr val="B4C7D2"/>
+            </a:solidFill>
+          </a:ln>
+          <a:effectLst/>
+        </p:spPr>
+      </p:cxnSp>
+      <p:cxnSp>
+        <p:nvCxnSpPr>
+          <p:cNvPr id="18" name="C1-E24 line 16" descr="sci-ppt:o016"/>
+          <p:cNvCxnSpPr/>
+          <p:nvPr/>
+        </p:nvCxnSpPr>
+        <p:spPr>
+          <a:xfrm>
+            <a:off x="1188720" y="2743200"/>
+            <a:ext cx="0" cy="2286000"/>
+          </a:xfrm>
+          <a:prstGeom prst="line">
+            <a:avLst/>
+          </a:prstGeom>
+          <a:ln w="7620">
+            <a:solidFill>
+              <a:srgbClr val="2E4756"/>
+            </a:solidFill>
+          </a:ln>
+          <a:effectLst/>
+        </p:spPr>
+      </p:cxnSp>
+      <p:sp>
+        <p:nvSpPr>
+          <p:cNvPr id="19" name="C1-E24 text 17" descr="sci-ppt:o017"/>
+          <p:cNvSpPr txBox="1"/>
+          <p:nvPr/>
+        </p:nvSpPr>
+        <p:spPr>
+          <a:xfrm>
+            <a:off x="731520" y="5111496"/>
+            <a:ext cx="914400" cy="208407"/>
+          </a:xfrm>
+          <a:prstGeom prst="rect">
+            <a:avLst/>
+          </a:prstGeom>
+          <a:noFill/>
+          <a:effectLst/>
+        </p:spPr>
+        <p:txBody>
+          <a:bodyPr wrap="none" lIns="18288" rIns="18288" tIns="18288" bIns="18288" anchor="t">
+            <a:spAutoFit/>
+          </a:bodyPr>
+          <a:lstStyle/>
+          <a:p>
+            <a:pPr algn="ctr">
+              <a:spcAft>
+                <a:spcPts val="0"/>
+              </a:spcAft>
+            </a:pPr>
+            <a:r>
+              <a:rPr sz="1050" b="0" i="0">
+                <a:solidFill>
+                  <a:srgbClr val="B4C7D2"/>
+                </a:solidFill>
+                <a:latin typeface="Arial"/>
+              </a:rPr>
+              <a:t>0.00</a:t>
+            </a:r>
+          </a:p>
+        </p:txBody>
+      </p:sp>
+      <p:cxnSp>
+        <p:nvCxnSpPr>
+          <p:cNvPr id="20" name="C1-E24 line 18" descr="sci-ppt:o018"/>
+          <p:cNvCxnSpPr/>
+          <p:nvPr/>
+        </p:nvCxnSpPr>
+        <p:spPr>
+          <a:xfrm>
+            <a:off x="2788920" y="5029200"/>
+            <a:ext cx="0" cy="64008"/>
+          </a:xfrm>
+          <a:prstGeom prst="line">
+            <a:avLst/>
+          </a:prstGeom>
+          <a:ln w="12700">
+            <a:solidFill>
+              <a:srgbClr val="B4C7D2"/>
+            </a:solidFill>
+          </a:ln>
+          <a:effectLst/>
+        </p:spPr>
+      </p:cxnSp>
+      <p:cxnSp>
+        <p:nvCxnSpPr>
+          <p:cNvPr id="21" name="C1-E24 line 19" descr="sci-ppt:o019"/>
+          <p:cNvCxnSpPr/>
+          <p:nvPr/>
+        </p:nvCxnSpPr>
+        <p:spPr>
+          <a:xfrm>
+            <a:off x="2788920" y="2743200"/>
+            <a:ext cx="0" cy="2286000"/>
+          </a:xfrm>
+          <a:prstGeom prst="line">
+            <a:avLst/>
+          </a:prstGeom>
+          <a:ln w="7620">
+            <a:solidFill>
+              <a:srgbClr val="2E4756"/>
+            </a:solidFill>
+          </a:ln>
+          <a:effectLst/>
+        </p:spPr>
+      </p:cxnSp>
+      <p:sp>
+        <p:nvSpPr>
+          <p:cNvPr id="22" name="C1-E24 text 20" descr="sci-ppt:o020"/>
+          <p:cNvSpPr txBox="1"/>
+          <p:nvPr/>
+        </p:nvSpPr>
+        <p:spPr>
+          <a:xfrm>
+            <a:off x="2331720" y="5111496"/>
+            <a:ext cx="914400" cy="208407"/>
+          </a:xfrm>
+          <a:prstGeom prst="rect">
+            <a:avLst/>
+          </a:prstGeom>
+          <a:noFill/>
+          <a:effectLst/>
+        </p:spPr>
+        <p:txBody>
+          <a:bodyPr wrap="none" lIns="18288" rIns="18288" tIns="18288" bIns="18288" anchor="t">
+            <a:spAutoFit/>
+          </a:bodyPr>
+          <a:lstStyle/>
+          <a:p>
+            <a:pPr algn="ctr">
+              <a:spcAft>
+                <a:spcPts val="0"/>
+              </a:spcAft>
+            </a:pPr>
+            <a:r>
+              <a:rPr sz="1050" b="0" i="0">
+                <a:solidFill>
+                  <a:srgbClr val="B4C7D2"/>
+                </a:solidFill>
+                <a:latin typeface="Arial"/>
+              </a:rPr>
+              <a:t>0.25</a:t>
+            </a:r>
+          </a:p>
+        </p:txBody>
+      </p:sp>
+      <p:cxnSp>
+        <p:nvCxnSpPr>
+          <p:cNvPr id="23" name="C1-E24 line 21" descr="sci-ppt:o021"/>
+          <p:cNvCxnSpPr/>
+          <p:nvPr/>
+        </p:nvCxnSpPr>
+        <p:spPr>
+          <a:xfrm>
+            <a:off x="4389120" y="5029200"/>
+            <a:ext cx="0" cy="64008"/>
+          </a:xfrm>
+          <a:prstGeom prst="line">
+            <a:avLst/>
+          </a:prstGeom>
+          <a:ln w="12700">
+            <a:solidFill>
+              <a:srgbClr val="B4C7D2"/>
+            </a:solidFill>
+          </a:ln>
+          <a:effectLst/>
+        </p:spPr>
+      </p:cxnSp>
+      <p:cxnSp>
+        <p:nvCxnSpPr>
+          <p:cNvPr id="24" name="C1-E24 line 22" descr="sci-ppt:o022"/>
+          <p:cNvCxnSpPr/>
+          <p:nvPr/>
+        </p:nvCxnSpPr>
+        <p:spPr>
+          <a:xfrm>
+            <a:off x="4389120" y="2743200"/>
+            <a:ext cx="0" cy="2286000"/>
+          </a:xfrm>
+          <a:prstGeom prst="line">
+            <a:avLst/>
+          </a:prstGeom>
+          <a:ln w="7620">
+            <a:solidFill>
+              <a:srgbClr val="2E4756"/>
+            </a:solidFill>
+          </a:ln>
+          <a:effectLst/>
+        </p:spPr>
+      </p:cxnSp>
+      <p:sp>
+        <p:nvSpPr>
+          <p:cNvPr id="25" name="C1-E24 text 23" descr="sci-ppt:o023"/>
+          <p:cNvSpPr txBox="1"/>
+          <p:nvPr/>
+        </p:nvSpPr>
+        <p:spPr>
+          <a:xfrm>
+            <a:off x="3931920" y="5111496"/>
+            <a:ext cx="914400" cy="208407"/>
+          </a:xfrm>
+          <a:prstGeom prst="rect">
+            <a:avLst/>
+          </a:prstGeom>
+          <a:noFill/>
+          <a:effectLst/>
+        </p:spPr>
+        <p:txBody>
+          <a:bodyPr wrap="none" lIns="18288" rIns="18288" tIns="18288" bIns="18288" anchor="t">
+            <a:spAutoFit/>
+          </a:bodyPr>
+          <a:lstStyle/>
+          <a:p>
+            <a:pPr algn="ctr">
+              <a:spcAft>
+                <a:spcPts val="0"/>
+              </a:spcAft>
+            </a:pPr>
+            <a:r>
+              <a:rPr sz="1050" b="0" i="0">
+                <a:solidFill>
+                  <a:srgbClr val="B4C7D2"/>
+                </a:solidFill>
+                <a:latin typeface="Arial"/>
+              </a:rPr>
+              <a:t>0.50</a:t>
+            </a:r>
+          </a:p>
+        </p:txBody>
+      </p:sp>
+      <p:cxnSp>
+        <p:nvCxnSpPr>
+          <p:cNvPr id="26" name="C1-E24 line 24" descr="sci-ppt:o024"/>
+          <p:cNvCxnSpPr/>
+          <p:nvPr/>
+        </p:nvCxnSpPr>
+        <p:spPr>
+          <a:xfrm>
+            <a:off x="5989320" y="5029200"/>
+            <a:ext cx="0" cy="64008"/>
+          </a:xfrm>
+          <a:prstGeom prst="line">
+            <a:avLst/>
+          </a:prstGeom>
+          <a:ln w="12700">
+            <a:solidFill>
+              <a:srgbClr val="B4C7D2"/>
+            </a:solidFill>
+          </a:ln>
+          <a:effectLst/>
+        </p:spPr>
+      </p:cxnSp>
+      <p:cxnSp>
+        <p:nvCxnSpPr>
+          <p:cNvPr id="27" name="C1-E24 line 25" descr="sci-ppt:o025"/>
+          <p:cNvCxnSpPr/>
+          <p:nvPr/>
+        </p:nvCxnSpPr>
+        <p:spPr>
+          <a:xfrm>
+            <a:off x="5989320" y="2743200"/>
+            <a:ext cx="0" cy="2286000"/>
+          </a:xfrm>
+          <a:prstGeom prst="line">
+            <a:avLst/>
+          </a:prstGeom>
+          <a:ln w="7620">
+            <a:solidFill>
+              <a:srgbClr val="2E4756"/>
+            </a:solidFill>
+          </a:ln>
+          <a:effectLst/>
+        </p:spPr>
+      </p:cxnSp>
+      <p:sp>
+        <p:nvSpPr>
+          <p:cNvPr id="28" name="C1-E24 text 26" descr="sci-ppt:o026"/>
+          <p:cNvSpPr txBox="1"/>
+          <p:nvPr/>
+        </p:nvSpPr>
+        <p:spPr>
+          <a:xfrm>
+            <a:off x="5532120" y="5111496"/>
+            <a:ext cx="914400" cy="208407"/>
+          </a:xfrm>
+          <a:prstGeom prst="rect">
+            <a:avLst/>
+          </a:prstGeom>
+          <a:noFill/>
+          <a:effectLst/>
+        </p:spPr>
+        <p:txBody>
+          <a:bodyPr wrap="none" lIns="18288" rIns="18288" tIns="18288" bIns="18288" anchor="t">
+            <a:spAutoFit/>
+          </a:bodyPr>
+          <a:lstStyle/>
+          <a:p>
+            <a:pPr algn="ctr">
+              <a:spcAft>
+                <a:spcPts val="0"/>
+              </a:spcAft>
+            </a:pPr>
+            <a:r>
+              <a:rPr sz="1050" b="0" i="0">
+                <a:solidFill>
+                  <a:srgbClr val="B4C7D2"/>
+                </a:solidFill>
+                <a:latin typeface="Arial"/>
+              </a:rPr>
+              <a:t>0.75</a:t>
+            </a:r>
+          </a:p>
+        </p:txBody>
+      </p:sp>
+      <p:cxnSp>
+        <p:nvCxnSpPr>
+          <p:cNvPr id="29" name="C1-E24 line 27" descr="sci-ppt:o027"/>
+          <p:cNvCxnSpPr/>
+          <p:nvPr/>
+        </p:nvCxnSpPr>
+        <p:spPr>
+          <a:xfrm>
+            <a:off x="7589520" y="5029200"/>
+            <a:ext cx="0" cy="64008"/>
+          </a:xfrm>
+          <a:prstGeom prst="line">
+            <a:avLst/>
+          </a:prstGeom>
+          <a:ln w="12700">
+            <a:solidFill>
+              <a:srgbClr val="B4C7D2"/>
+            </a:solidFill>
+          </a:ln>
+          <a:effectLst/>
+        </p:spPr>
+      </p:cxnSp>
+      <p:cxnSp>
+        <p:nvCxnSpPr>
+          <p:cNvPr id="30" name="C1-E24 line 28" descr="sci-ppt:o028"/>
+          <p:cNvCxnSpPr/>
+          <p:nvPr/>
+        </p:nvCxnSpPr>
+        <p:spPr>
+          <a:xfrm>
+            <a:off x="7589520" y="2743200"/>
+            <a:ext cx="0" cy="2286000"/>
+          </a:xfrm>
+          <a:prstGeom prst="line">
+            <a:avLst/>
+          </a:prstGeom>
+          <a:ln w="7620">
+            <a:solidFill>
+              <a:srgbClr val="2E4756"/>
+            </a:solidFill>
+          </a:ln>
+          <a:effectLst/>
+        </p:spPr>
+      </p:cxnSp>
+      <p:sp>
+        <p:nvSpPr>
+          <p:cNvPr id="31" name="C1-E24 text 29" descr="sci-ppt:o029"/>
+          <p:cNvSpPr txBox="1"/>
+          <p:nvPr/>
+        </p:nvSpPr>
+        <p:spPr>
+          <a:xfrm>
+            <a:off x="7132320" y="5111496"/>
+            <a:ext cx="914400" cy="208407"/>
+          </a:xfrm>
+          <a:prstGeom prst="rect">
+            <a:avLst/>
+          </a:prstGeom>
+          <a:noFill/>
+          <a:effectLst/>
+        </p:spPr>
+        <p:txBody>
+          <a:bodyPr wrap="none" lIns="18288" rIns="18288" tIns="18288" bIns="18288" anchor="t">
+            <a:spAutoFit/>
+          </a:bodyPr>
+          <a:lstStyle/>
+          <a:p>
+            <a:pPr algn="ctr">
+              <a:spcAft>
+                <a:spcPts val="0"/>
+              </a:spcAft>
+            </a:pPr>
+            <a:r>
+              <a:rPr sz="1050" b="0" i="0">
+                <a:solidFill>
+                  <a:srgbClr val="B4C7D2"/>
+                </a:solidFill>
+                <a:latin typeface="Arial"/>
+              </a:rPr>
+              <a:t>1.00</a:t>
+            </a:r>
+          </a:p>
+        </p:txBody>
+      </p:sp>
+      <p:cxnSp>
+        <p:nvCxnSpPr>
+          <p:cNvPr id="32" name="C1-E24 line 30" descr="sci-ppt:o030"/>
+          <p:cNvCxnSpPr/>
+          <p:nvPr/>
+        </p:nvCxnSpPr>
+        <p:spPr>
+          <a:xfrm>
+            <a:off x="1124712" y="5029200"/>
+            <a:ext cx="64008" cy="0"/>
+          </a:xfrm>
+          <a:prstGeom prst="line">
+            <a:avLst/>
+          </a:prstGeom>
+          <a:ln w="12700">
+            <a:solidFill>
+              <a:srgbClr val="B4C7D2"/>
+            </a:solidFill>
+          </a:ln>
+          <a:effectLst/>
+        </p:spPr>
+      </p:cxnSp>
+      <p:cxnSp>
+        <p:nvCxnSpPr>
+          <p:cNvPr id="33" name="C1-E24 line 31" descr="sci-ppt:o031"/>
+          <p:cNvCxnSpPr/>
+          <p:nvPr/>
+        </p:nvCxnSpPr>
+        <p:spPr>
+          <a:xfrm>
+            <a:off x="1124712" y="3990109"/>
+            <a:ext cx="64008" cy="0"/>
+          </a:xfrm>
+          <a:prstGeom prst="line">
+            <a:avLst/>
+          </a:prstGeom>
+          <a:ln w="12700">
+            <a:solidFill>
+              <a:srgbClr val="B4C7D2"/>
+            </a:solidFill>
+          </a:ln>
+          <a:effectLst/>
+        </p:spPr>
+      </p:cxnSp>
+      <p:cxnSp>
+        <p:nvCxnSpPr>
+          <p:cNvPr id="34" name="C1-E24 line 32" descr="sci-ppt:o032"/>
+          <p:cNvCxnSpPr/>
+          <p:nvPr/>
+        </p:nvCxnSpPr>
+        <p:spPr>
+          <a:xfrm>
+            <a:off x="1188720" y="3990109"/>
+            <a:ext cx="6400800" cy="0"/>
+          </a:xfrm>
+          <a:prstGeom prst="line">
+            <a:avLst/>
+          </a:prstGeom>
+          <a:ln w="7620">
+            <a:solidFill>
+              <a:srgbClr val="2E4756"/>
+            </a:solidFill>
+          </a:ln>
+          <a:effectLst/>
+        </p:spPr>
+      </p:cxnSp>
+      <p:sp>
+        <p:nvSpPr>
+          <p:cNvPr id="35" name="C1-E24 text 33" descr="sci-ppt:o033"/>
+          <p:cNvSpPr txBox="1"/>
+          <p:nvPr/>
+        </p:nvSpPr>
+        <p:spPr>
+          <a:xfrm>
+            <a:off x="320040" y="3907813"/>
+            <a:ext cx="777240" cy="208407"/>
+          </a:xfrm>
+          <a:prstGeom prst="rect">
+            <a:avLst/>
+          </a:prstGeom>
+          <a:noFill/>
+          <a:effectLst/>
+        </p:spPr>
+        <p:txBody>
+          <a:bodyPr wrap="none" lIns="18288" rIns="18288" tIns="18288" bIns="18288" anchor="t">
+            <a:spAutoFit/>
+          </a:bodyPr>
+          <a:lstStyle/>
+          <a:p>
+            <a:pPr algn="r">
+              <a:spcAft>
+                <a:spcPts val="0"/>
+              </a:spcAft>
+            </a:pPr>
+            <a:r>
+              <a:rPr sz="1050" b="0" i="0">
+                <a:solidFill>
+                  <a:srgbClr val="B4C7D2"/>
+                </a:solidFill>
+                <a:latin typeface="Arial"/>
+              </a:rPr>
+              <a:t>0.5</a:t>
+            </a:r>
+          </a:p>
+        </p:txBody>
+      </p:sp>
+      <p:cxnSp>
+        <p:nvCxnSpPr>
+          <p:cNvPr id="36" name="C1-E24 line 34" descr="sci-ppt:o034"/>
+          <p:cNvCxnSpPr/>
+          <p:nvPr/>
+        </p:nvCxnSpPr>
+        <p:spPr>
+          <a:xfrm>
+            <a:off x="1124712" y="2951018"/>
+            <a:ext cx="64008" cy="0"/>
+          </a:xfrm>
+          <a:prstGeom prst="line">
+            <a:avLst/>
+          </a:prstGeom>
+          <a:ln w="12700">
+            <a:solidFill>
+              <a:srgbClr val="B4C7D2"/>
+            </a:solidFill>
+          </a:ln>
+          <a:effectLst/>
+        </p:spPr>
+      </p:cxnSp>
+      <p:cxnSp>
+        <p:nvCxnSpPr>
+          <p:cNvPr id="37" name="C1-E24 line 35" descr="sci-ppt:o035"/>
+          <p:cNvCxnSpPr/>
+          <p:nvPr/>
+        </p:nvCxnSpPr>
+        <p:spPr>
+          <a:xfrm>
+            <a:off x="1188720" y="2951018"/>
+            <a:ext cx="6400800" cy="0"/>
+          </a:xfrm>
+          <a:prstGeom prst="line">
+            <a:avLst/>
+          </a:prstGeom>
+          <a:ln w="7620">
+            <a:solidFill>
+              <a:srgbClr val="2E4756"/>
+            </a:solidFill>
+          </a:ln>
+          <a:effectLst/>
+        </p:spPr>
+      </p:cxnSp>
+      <p:sp>
+        <p:nvSpPr>
+          <p:cNvPr id="38" name="C1-E24 text 36" descr="sci-ppt:o036"/>
+          <p:cNvSpPr txBox="1"/>
+          <p:nvPr/>
+        </p:nvSpPr>
+        <p:spPr>
+          <a:xfrm>
+            <a:off x="320040" y="2868722"/>
+            <a:ext cx="777240" cy="208407"/>
+          </a:xfrm>
+          <a:prstGeom prst="rect">
+            <a:avLst/>
+          </a:prstGeom>
+          <a:noFill/>
+          <a:effectLst/>
+        </p:spPr>
+        <p:txBody>
+          <a:bodyPr wrap="none" lIns="18288" rIns="18288" tIns="18288" bIns="18288" anchor="t">
+            <a:spAutoFit/>
+          </a:bodyPr>
+          <a:lstStyle/>
+          <a:p>
+            <a:pPr algn="r">
+              <a:spcAft>
+                <a:spcPts val="0"/>
+              </a:spcAft>
+            </a:pPr>
+            <a:r>
+              <a:rPr sz="1050" b="0" i="0">
+                <a:solidFill>
+                  <a:srgbClr val="B4C7D2"/>
+                </a:solidFill>
+                <a:latin typeface="Arial"/>
+              </a:rPr>
+              <a:t>1.0</a:t>
+            </a:r>
+          </a:p>
+        </p:txBody>
+      </p:sp>
+      <p:sp>
+        <p:nvSpPr>
+          <p:cNvPr id="39" name="C1-E24 text 37" descr="sci-ppt:o037"/>
+          <p:cNvSpPr txBox="1"/>
+          <p:nvPr/>
+        </p:nvSpPr>
+        <p:spPr>
+          <a:xfrm>
+            <a:off x="1188720" y="5312664"/>
+            <a:ext cx="6400800" cy="231648"/>
+          </a:xfrm>
+          <a:prstGeom prst="rect">
+            <a:avLst/>
+          </a:prstGeom>
+          <a:noFill/>
+          <a:effectLst/>
+        </p:spPr>
+        <p:txBody>
+          <a:bodyPr wrap="none" lIns="18288" rIns="18288" tIns="18288" bIns="18288" anchor="t">
+            <a:spAutoFit/>
+          </a:bodyPr>
+          <a:lstStyle/>
+          <a:p>
+            <a:pPr algn="ctr">
+              <a:spcAft>
+                <a:spcPts val="0"/>
+              </a:spcAft>
+            </a:pPr>
+            <a:r>
+              <a:rPr sz="1200" b="0" i="0">
+                <a:solidFill>
+                  <a:srgbClr val="E7F0F3"/>
+                </a:solidFill>
+                <a:latin typeface="Arial"/>
+              </a:rPr>
+              <a:t>z / L</a:t>
+            </a:r>
+          </a:p>
+        </p:txBody>
+      </p:sp>
+      <p:sp>
+        <p:nvSpPr>
+          <p:cNvPr id="40" name="C1-E24 text 38" descr="sci-ppt:o038"/>
+          <p:cNvSpPr txBox="1"/>
+          <p:nvPr/>
+        </p:nvSpPr>
+        <p:spPr>
+          <a:xfrm>
+            <a:off x="640080" y="2395728"/>
+            <a:ext cx="6400800" cy="231648"/>
+          </a:xfrm>
+          <a:prstGeom prst="rect">
+            <a:avLst/>
+          </a:prstGeom>
+          <a:noFill/>
+          <a:effectLst/>
+        </p:spPr>
+        <p:txBody>
+          <a:bodyPr wrap="none" lIns="18288" rIns="18288" tIns="18288" bIns="18288" anchor="t">
             <a:spAutoFit/>
           </a:bodyPr>
           <a:lstStyle/>
@@ -3265,27 +4205,279 @@
               </a:spcAft>
             </a:pPr>
             <a:r>
-              <a:rPr sz="1920" b="0" i="0">
+              <a:rPr sz="1200" b="0" i="0">
                 <a:solidFill>
                   <a:srgbClr val="E7F0F3"/>
                 </a:solidFill>
                 <a:latin typeface="Arial"/>
               </a:rPr>
-              <a:t>Π0 at z = 0</a:t>
-            </a:r>
-          </a:p>
-        </p:txBody>
-      </p:sp>
-      <p:sp>
-        <p:nvSpPr>
-          <p:cNvPr id="8" name="text7" descr="sci-ppt:C1-E24-007"/>
+              <a:t>Π / Π₀</a:t>
+            </a:r>
+          </a:p>
+        </p:txBody>
+      </p:sp>
+      <p:sp>
+        <p:nvSpPr>
+          <p:cNvPr id="41" name="C1-E24 polygon 39" descr="sci-ppt:o039"/>
+          <p:cNvSpPr/>
+          <p:nvPr/>
+        </p:nvSpPr>
+        <p:spPr>
+          <a:xfrm>
+            <a:off x="1188720" y="2951018"/>
+            <a:ext cx="6400800" cy="2078182"/>
+          </a:xfrm>
+          <a:custGeom>
+            <a:avLst/>
+            <a:gdLst/>
+            <a:ahLst/>
+            <a:cxnLst/>
+            <a:rect l="l" t="t" r="r" b="b"/>
+            <a:pathLst>
+              <a:path w="6400800" h="2078182">
+                <a:moveTo>
+                  <a:pt x="0" y="0"/>
+                </a:moveTo>
+                <a:lnTo>
+                  <a:pt x="130628" y="42412"/>
+                </a:lnTo>
+                <a:lnTo>
+                  <a:pt x="261257" y="84823"/>
+                </a:lnTo>
+                <a:lnTo>
+                  <a:pt x="391885" y="127235"/>
+                </a:lnTo>
+                <a:lnTo>
+                  <a:pt x="522514" y="169647"/>
+                </a:lnTo>
+                <a:lnTo>
+                  <a:pt x="653142" y="212059"/>
+                </a:lnTo>
+                <a:lnTo>
+                  <a:pt x="783771" y="254471"/>
+                </a:lnTo>
+                <a:lnTo>
+                  <a:pt x="914400" y="296883"/>
+                </a:lnTo>
+                <a:lnTo>
+                  <a:pt x="1045028" y="339295"/>
+                </a:lnTo>
+                <a:lnTo>
+                  <a:pt x="1175657" y="381707"/>
+                </a:lnTo>
+                <a:lnTo>
+                  <a:pt x="1306285" y="424118"/>
+                </a:lnTo>
+                <a:lnTo>
+                  <a:pt x="1436914" y="466530"/>
+                </a:lnTo>
+                <a:lnTo>
+                  <a:pt x="1567542" y="508942"/>
+                </a:lnTo>
+                <a:lnTo>
+                  <a:pt x="1698171" y="551354"/>
+                </a:lnTo>
+                <a:lnTo>
+                  <a:pt x="1828800" y="593766"/>
+                </a:lnTo>
+                <a:lnTo>
+                  <a:pt x="1959428" y="636178"/>
+                </a:lnTo>
+                <a:lnTo>
+                  <a:pt x="2090057" y="678590"/>
+                </a:lnTo>
+                <a:lnTo>
+                  <a:pt x="2220685" y="721002"/>
+                </a:lnTo>
+                <a:lnTo>
+                  <a:pt x="2351314" y="763413"/>
+                </a:lnTo>
+                <a:lnTo>
+                  <a:pt x="2481942" y="805825"/>
+                </a:lnTo>
+                <a:lnTo>
+                  <a:pt x="2612571" y="848237"/>
+                </a:lnTo>
+                <a:lnTo>
+                  <a:pt x="2743200" y="890649"/>
+                </a:lnTo>
+                <a:lnTo>
+                  <a:pt x="2873828" y="933061"/>
+                </a:lnTo>
+                <a:lnTo>
+                  <a:pt x="3004457" y="975473"/>
+                </a:lnTo>
+                <a:lnTo>
+                  <a:pt x="3135085" y="1017885"/>
+                </a:lnTo>
+                <a:lnTo>
+                  <a:pt x="3265714" y="1060297"/>
+                </a:lnTo>
+                <a:lnTo>
+                  <a:pt x="3396342" y="1102708"/>
+                </a:lnTo>
+                <a:lnTo>
+                  <a:pt x="3526971" y="1145120"/>
+                </a:lnTo>
+                <a:lnTo>
+                  <a:pt x="3657600" y="1187532"/>
+                </a:lnTo>
+                <a:lnTo>
+                  <a:pt x="3788228" y="1229944"/>
+                </a:lnTo>
+                <a:lnTo>
+                  <a:pt x="3918857" y="1272356"/>
+                </a:lnTo>
+                <a:lnTo>
+                  <a:pt x="4049485" y="1314768"/>
+                </a:lnTo>
+                <a:lnTo>
+                  <a:pt x="4180114" y="1357180"/>
+                </a:lnTo>
+                <a:lnTo>
+                  <a:pt x="4310742" y="1399592"/>
+                </a:lnTo>
+                <a:lnTo>
+                  <a:pt x="4441371" y="1442003"/>
+                </a:lnTo>
+                <a:lnTo>
+                  <a:pt x="4572000" y="1484415"/>
+                </a:lnTo>
+                <a:lnTo>
+                  <a:pt x="4702628" y="1526827"/>
+                </a:lnTo>
+                <a:lnTo>
+                  <a:pt x="4833257" y="1569239"/>
+                </a:lnTo>
+                <a:lnTo>
+                  <a:pt x="4963885" y="1611651"/>
+                </a:lnTo>
+                <a:lnTo>
+                  <a:pt x="5094514" y="1654063"/>
+                </a:lnTo>
+                <a:lnTo>
+                  <a:pt x="5225142" y="1696475"/>
+                </a:lnTo>
+                <a:lnTo>
+                  <a:pt x="5355771" y="1738887"/>
+                </a:lnTo>
+                <a:lnTo>
+                  <a:pt x="5486400" y="1781298"/>
+                </a:lnTo>
+                <a:lnTo>
+                  <a:pt x="5617028" y="1823710"/>
+                </a:lnTo>
+                <a:lnTo>
+                  <a:pt x="5747657" y="1866122"/>
+                </a:lnTo>
+                <a:lnTo>
+                  <a:pt x="5878285" y="1908534"/>
+                </a:lnTo>
+                <a:lnTo>
+                  <a:pt x="6008914" y="1950946"/>
+                </a:lnTo>
+                <a:lnTo>
+                  <a:pt x="6139542" y="1993358"/>
+                </a:lnTo>
+                <a:lnTo>
+                  <a:pt x="6270171" y="2035770"/>
+                </a:lnTo>
+                <a:lnTo>
+                  <a:pt x="6400800" y="2078182"/>
+                </a:lnTo>
+              </a:path>
+            </a:pathLst>
+          </a:custGeom>
+          <a:noFill/>
+          <a:ln w="40640">
+            <a:solidFill>
+              <a:srgbClr val="F2B880"/>
+            </a:solidFill>
+          </a:ln>
+          <a:effectLst/>
+        </p:spPr>
+        <p:txBody>
+          <a:bodyPr rtlCol="0" anchor="ctr"/>
+          <a:lstStyle/>
+          <a:p>
+            <a:pPr algn="ctr"/>
+          </a:p>
+        </p:txBody>
+      </p:sp>
+      <p:sp>
+        <p:nvSpPr>
+          <p:cNvPr id="42" name="C1-E24 ellipse 40" descr="sci-ppt:o040"/>
+          <p:cNvSpPr/>
+          <p:nvPr/>
+        </p:nvSpPr>
+        <p:spPr>
+          <a:xfrm>
+            <a:off x="1115568" y="2877866"/>
+            <a:ext cx="146304" cy="146304"/>
+          </a:xfrm>
+          <a:prstGeom prst="ellipse">
+            <a:avLst/>
+          </a:prstGeom>
+          <a:solidFill>
+            <a:srgbClr val="F2B880"/>
+          </a:solidFill>
+          <a:ln w="12700">
+            <a:solidFill>
+              <a:srgbClr val="F2B880"/>
+            </a:solidFill>
+          </a:ln>
+          <a:effectLst/>
+        </p:spPr>
+        <p:txBody>
+          <a:bodyPr rtlCol="0" anchor="ctr"/>
+          <a:lstStyle/>
+          <a:p>
+            <a:pPr algn="ctr"/>
+          </a:p>
+        </p:txBody>
+      </p:sp>
+      <p:sp>
+        <p:nvSpPr>
+          <p:cNvPr id="43" name="C1-E24 ellipse 41" descr="sci-ppt:o041"/>
+          <p:cNvSpPr/>
+          <p:nvPr/>
+        </p:nvSpPr>
+        <p:spPr>
+          <a:xfrm>
+            <a:off x="7516368" y="4956048"/>
+            <a:ext cx="146304" cy="146304"/>
+          </a:xfrm>
+          <a:prstGeom prst="ellipse">
+            <a:avLst/>
+          </a:prstGeom>
+          <a:solidFill>
+            <a:srgbClr val="8EDBD4"/>
+          </a:solidFill>
+          <a:ln w="12700">
+            <a:solidFill>
+              <a:srgbClr val="8EDBD4"/>
+            </a:solidFill>
+          </a:ln>
+          <a:effectLst/>
+        </p:spPr>
+        <p:txBody>
+          <a:bodyPr rtlCol="0" anchor="ctr"/>
+          <a:lstStyle/>
+          <a:p>
+            <a:pPr algn="ctr"/>
+          </a:p>
+        </p:txBody>
+      </p:sp>
+      <p:sp>
+        <p:nvSpPr>
+          <p:cNvPr id="44" name="C1-E24 text 42" descr="sci-ppt:o042"/>
           <p:cNvSpPr txBox="1"/>
           <p:nvPr/>
         </p:nvSpPr>
         <p:spPr>
           <a:xfrm>
-            <a:off x="7315200" y="1463040"/>
-            <a:ext cx="4267200" cy="377952"/>
+            <a:off x="3566160" y="3441469"/>
+            <a:ext cx="2743200" cy="247142"/>
           </a:xfrm>
           <a:prstGeom prst="rect">
             <a:avLst/>
@@ -3294,7 +4486,7 @@
           <a:effectLst/>
         </p:spPr>
         <p:txBody>
-          <a:bodyPr wrap="none" lIns="27432" rIns="27432" tIns="18288" bIns="18288" anchor="ctr">
+          <a:bodyPr wrap="none" lIns="18288" rIns="18288" tIns="18288" bIns="18288" anchor="t">
             <a:spAutoFit/>
           </a:bodyPr>
           <a:lstStyle/>
@@ -3305,39 +4497,127 @@
               </a:spcAft>
             </a:pPr>
             <a:r>
-              <a:rPr sz="1920" b="0" i="0">
+              <a:rPr sz="1300" b="0" i="0">
+                <a:solidFill>
+                  <a:srgbClr val="F2B880"/>
+                </a:solidFill>
+                <a:latin typeface="Arial"/>
+              </a:rPr>
+              <a:t>Π(z) = Π₀(1 − z/L)</a:t>
+            </a:r>
+          </a:p>
+        </p:txBody>
+      </p:sp>
+      <p:sp>
+        <p:nvSpPr>
+          <p:cNvPr id="45" name="C1-E24 round_rect 43" descr="sci-ppt:o043"/>
+          <p:cNvSpPr/>
+          <p:nvPr/>
+        </p:nvSpPr>
+        <p:spPr>
+          <a:xfrm>
+            <a:off x="8138160" y="1097280"/>
+            <a:ext cx="3703320" cy="4206240"/>
+          </a:xfrm>
+          <a:prstGeom prst="roundRect">
+            <a:avLst/>
+          </a:prstGeom>
+          <a:solidFill>
+            <a:srgbClr val="213E4B"/>
+          </a:solidFill>
+          <a:ln w="20320">
+            <a:solidFill>
+              <a:srgbClr val="8EDBD4"/>
+            </a:solidFill>
+          </a:ln>
+          <a:effectLst/>
+        </p:spPr>
+        <p:txBody>
+          <a:bodyPr rtlCol="0" anchor="ctr"/>
+          <a:lstStyle/>
+          <a:p>
+            <a:pPr algn="ctr"/>
+          </a:p>
+        </p:txBody>
+      </p:sp>
+      <p:sp>
+        <p:nvSpPr>
+          <p:cNvPr id="46" name="C1-E24 text 44" descr="sci-ppt:o044"/>
+          <p:cNvSpPr txBox="1"/>
+          <p:nvPr/>
+        </p:nvSpPr>
+        <p:spPr>
+          <a:xfrm>
+            <a:off x="8247888" y="1152144"/>
+            <a:ext cx="3483863" cy="254889"/>
+          </a:xfrm>
+          <a:prstGeom prst="rect">
+            <a:avLst/>
+          </a:prstGeom>
+          <a:noFill/>
+          <a:effectLst/>
+        </p:spPr>
+        <p:txBody>
+          <a:bodyPr wrap="none" lIns="18288" rIns="18288" tIns="18288" bIns="18288" anchor="t">
+            <a:spAutoFit/>
+          </a:bodyPr>
+          <a:lstStyle/>
+          <a:p>
+            <a:pPr algn="l">
+              <a:spcAft>
+                <a:spcPts val="0"/>
+              </a:spcAft>
+            </a:pPr>
+            <a:r>
+              <a:rPr sz="1350" b="1" i="0">
+                <a:solidFill>
+                  <a:srgbClr val="8EDBD4"/>
+                </a:solidFill>
+                <a:latin typeface="Arial"/>
+              </a:rPr>
+              <a:t>Straight column</a:t>
+            </a:r>
+          </a:p>
+        </p:txBody>
+      </p:sp>
+      <p:sp>
+        <p:nvSpPr>
+          <p:cNvPr id="47" name="C1-E24 text 45" descr="sci-ppt:o045"/>
+          <p:cNvSpPr txBox="1"/>
+          <p:nvPr/>
+        </p:nvSpPr>
+        <p:spPr>
+          <a:xfrm>
+            <a:off x="8275320" y="1554480"/>
+            <a:ext cx="3474720" cy="448563"/>
+          </a:xfrm>
+          <a:prstGeom prst="rect">
+            <a:avLst/>
+          </a:prstGeom>
+          <a:noFill/>
+          <a:effectLst/>
+        </p:spPr>
+        <p:txBody>
+          <a:bodyPr wrap="none" lIns="18288" rIns="18288" tIns="18288" bIns="18288" anchor="t">
+            <a:spAutoFit/>
+          </a:bodyPr>
+          <a:lstStyle/>
+          <a:p>
+            <a:pPr algn="l">
+              <a:spcAft>
+                <a:spcPts val="0"/>
+              </a:spcAft>
+            </a:pPr>
+            <a:r>
+              <a:rPr sz="1300" b="1" i="0">
                 <a:solidFill>
                   <a:srgbClr val="E7F0F3"/>
                 </a:solidFill>
                 <a:latin typeface="Arial"/>
               </a:rPr>
-              <a:t>Π = 0 at z = L</a:t>
-            </a:r>
-          </a:p>
-        </p:txBody>
-      </p:sp>
-      <p:sp>
-        <p:nvSpPr>
-          <p:cNvPr id="9" name="text8" descr="sci-ppt:C1-E24-008"/>
-          <p:cNvSpPr txBox="1"/>
-          <p:nvPr/>
-        </p:nvSpPr>
-        <p:spPr>
-          <a:xfrm>
-            <a:off x="3108960" y="2987040"/>
-            <a:ext cx="4876800" cy="359054"/>
-          </a:xfrm>
-          <a:prstGeom prst="rect">
-            <a:avLst/>
-          </a:prstGeom>
-          <a:noFill/>
-          <a:effectLst/>
-        </p:spPr>
-        <p:txBody>
-          <a:bodyPr wrap="none" lIns="27432" rIns="27432" tIns="18288" bIns="18288" anchor="ctr">
-            <a:spAutoFit/>
-          </a:bodyPr>
-          <a:lstStyle/>
+              <a:t>d²Π/dz² = 0</a:t>
+            </a:r>
+          </a:p>
           <a:p>
             <a:pPr algn="l">
               <a:spcAft>
@@ -3345,27 +4625,27 @@
               </a:spcAft>
             </a:pPr>
             <a:r>
-              <a:rPr sz="1823" b="0" i="0">
+              <a:rPr sz="1300" b="1" i="0">
                 <a:solidFill>
                   <a:srgbClr val="E7F0F3"/>
                 </a:solidFill>
                 <a:latin typeface="Arial"/>
               </a:rPr>
-              <a:t>Δ u_z toward outlet</a:t>
-            </a:r>
-          </a:p>
-        </p:txBody>
-      </p:sp>
-      <p:sp>
-        <p:nvSpPr>
-          <p:cNvPr id="10" name="text9" descr="sci-ppt:C1-E24-009"/>
+              <a:t>Π = Π₀ (1 − z/L)</a:t>
+            </a:r>
+          </a:p>
+        </p:txBody>
+      </p:sp>
+      <p:sp>
+        <p:nvSpPr>
+          <p:cNvPr id="48" name="C1-E24 text 46" descr="sci-ppt:o046"/>
           <p:cNvSpPr txBox="1"/>
           <p:nvPr/>
         </p:nvSpPr>
         <p:spPr>
           <a:xfrm>
-            <a:off x="2255520" y="4084320"/>
-            <a:ext cx="9022080" cy="359054"/>
+            <a:off x="8275320" y="2331720"/>
+            <a:ext cx="3474720" cy="247142"/>
           </a:xfrm>
           <a:prstGeom prst="rect">
             <a:avLst/>
@@ -3374,7 +4654,7 @@
           <a:effectLst/>
         </p:spPr>
         <p:txBody>
-          <a:bodyPr wrap="none" lIns="27432" rIns="27432" tIns="18288" bIns="18288" anchor="ctr">
+          <a:bodyPr wrap="none" lIns="18288" rIns="18288" tIns="18288" bIns="18288" anchor="t">
             <a:spAutoFit/>
           </a:bodyPr>
           <a:lstStyle/>
@@ -3385,39 +4665,55 @@
               </a:spcAft>
             </a:pPr>
             <a:r>
-              <a:rPr sz="1823" b="0" i="0">
+              <a:rPr sz="1300" b="1" i="0">
+                <a:solidFill>
+                  <a:srgbClr val="8EDBD4"/>
+                </a:solidFill>
+                <a:latin typeface="Arial"/>
+              </a:rPr>
+              <a:t>Δu_z = −(1/ρ) dΠ/dz = Π₀ / (ρL)</a:t>
+            </a:r>
+          </a:p>
+        </p:txBody>
+      </p:sp>
+      <p:sp>
+        <p:nvSpPr>
+          <p:cNvPr id="49" name="C1-E24 text 47" descr="sci-ppt:o047"/>
+          <p:cNvSpPr txBox="1"/>
+          <p:nvPr/>
+        </p:nvSpPr>
+        <p:spPr>
+          <a:xfrm>
+            <a:off x="8275320" y="2926080"/>
+            <a:ext cx="3474720" cy="417576"/>
+          </a:xfrm>
+          <a:prstGeom prst="rect">
+            <a:avLst/>
+          </a:prstGeom>
+          <a:noFill/>
+          <a:effectLst/>
+        </p:spPr>
+        <p:txBody>
+          <a:bodyPr wrap="none" lIns="18288" rIns="18288" tIns="18288" bIns="18288" anchor="t">
+            <a:spAutoFit/>
+          </a:bodyPr>
+          <a:lstStyle/>
+          <a:p>
+            <a:pPr algn="l">
+              <a:spcAft>
+                <a:spcPts val="0"/>
+              </a:spcAft>
+            </a:pPr>
+            <a:r>
+              <a:rPr sz="1200" b="0" i="0">
                 <a:solidFill>
                   <a:srgbClr val="E7F0F3"/>
                 </a:solidFill>
                 <a:latin typeface="Arial"/>
               </a:rPr>
-              <a:t>Pressure impulse gradient drives early acceleration.</a:t>
-            </a:r>
-          </a:p>
-        </p:txBody>
-      </p:sp>
-      <p:sp>
-        <p:nvSpPr>
-          <p:cNvPr id="11" name="text10" descr="sci-ppt:C1-E24-010"/>
-          <p:cNvSpPr txBox="1"/>
-          <p:nvPr/>
-        </p:nvSpPr>
-        <p:spPr>
-          <a:xfrm>
-            <a:off x="365760" y="4974336"/>
-            <a:ext cx="5547360" cy="321259"/>
-          </a:xfrm>
-          <a:prstGeom prst="rect">
-            <a:avLst/>
-          </a:prstGeom>
-          <a:noFill/>
-          <a:effectLst/>
-        </p:spPr>
-        <p:txBody>
-          <a:bodyPr wrap="none" lIns="27432" rIns="27432" tIns="18288" bIns="18288" anchor="ctr">
-            <a:spAutoFit/>
-          </a:bodyPr>
-          <a:lstStyle/>
+              <a:t>With Π₀ = 0.30 Pa·s, ρ = 1000 kg/m³, L =</a:t>
+            </a:r>
+          </a:p>
           <a:p>
             <a:pPr algn="l">
               <a:spcAft>
@@ -3425,27 +4721,27 @@
               </a:spcAft>
             </a:pPr>
             <a:r>
-              <a:rPr sz="1632" b="0" i="0">
+              <a:rPr sz="1200" b="0" i="0">
                 <a:solidFill>
                   <a:srgbClr val="E7F0F3"/>
                 </a:solidFill>
                 <a:latin typeface="Arial"/>
               </a:rPr>
-              <a:t>z = 0: Π₀</a:t>
-            </a:r>
-          </a:p>
-        </p:txBody>
-      </p:sp>
-      <p:sp>
-        <p:nvSpPr>
-          <p:cNvPr id="12" name="text11" descr="sci-ppt:C1-E24-011"/>
+              <a:t>100 µm:</a:t>
+            </a:r>
+          </a:p>
+        </p:txBody>
+      </p:sp>
+      <p:sp>
+        <p:nvSpPr>
+          <p:cNvPr id="50" name="C1-E24 text 48" descr="sci-ppt:o048"/>
           <p:cNvSpPr txBox="1"/>
           <p:nvPr/>
         </p:nvSpPr>
         <p:spPr>
           <a:xfrm>
-            <a:off x="365760" y="5266944"/>
-            <a:ext cx="5547360" cy="321259"/>
+            <a:off x="8275320" y="3429000"/>
+            <a:ext cx="3474720" cy="309117"/>
           </a:xfrm>
           <a:prstGeom prst="rect">
             <a:avLst/>
@@ -3454,7 +4750,7 @@
           <a:effectLst/>
         </p:spPr>
         <p:txBody>
-          <a:bodyPr wrap="none" lIns="27432" rIns="27432" tIns="18288" bIns="18288" anchor="ctr">
+          <a:bodyPr wrap="none" lIns="18288" rIns="18288" tIns="18288" bIns="18288" anchor="t">
             <a:spAutoFit/>
           </a:bodyPr>
           <a:lstStyle/>
@@ -3465,27 +4761,139 @@
               </a:spcAft>
             </a:pPr>
             <a:r>
-              <a:rPr sz="1632" b="0" i="0">
+              <a:rPr sz="1700" b="1" i="0">
+                <a:solidFill>
+                  <a:srgbClr val="F2B880"/>
+                </a:solidFill>
+                <a:latin typeface="Arial"/>
+              </a:rPr>
+              <a:t>Δu_z = 3.0 m/s</a:t>
+            </a:r>
+          </a:p>
+        </p:txBody>
+      </p:sp>
+      <p:sp>
+        <p:nvSpPr>
+          <p:cNvPr id="51" name="C1-E24 text 49" descr="sci-ppt:o049"/>
+          <p:cNvSpPr txBox="1"/>
+          <p:nvPr/>
+        </p:nvSpPr>
+        <p:spPr>
+          <a:xfrm>
+            <a:off x="8275320" y="4023360"/>
+            <a:ext cx="3474720" cy="603504"/>
+          </a:xfrm>
+          <a:prstGeom prst="rect">
+            <a:avLst/>
+          </a:prstGeom>
+          <a:noFill/>
+          <a:effectLst/>
+        </p:spPr>
+        <p:txBody>
+          <a:bodyPr wrap="none" lIns="18288" rIns="18288" tIns="18288" bIns="18288" anchor="t">
+            <a:spAutoFit/>
+          </a:bodyPr>
+          <a:lstStyle/>
+          <a:p>
+            <a:pPr algn="l">
+              <a:spcAft>
+                <a:spcPts val="0"/>
+              </a:spcAft>
+            </a:pPr>
+            <a:r>
+              <a:rPr sz="1200" b="0" i="0">
+                <a:solidFill>
+                  <a:srgbClr val="B4C7D2"/>
+                </a:solidFill>
+                <a:latin typeface="Arial"/>
+              </a:rPr>
+              <a:t>The impulse drops linearly, so every slice</a:t>
+            </a:r>
+          </a:p>
+          <a:p>
+            <a:pPr algn="l">
+              <a:spcAft>
+                <a:spcPts val="0"/>
+              </a:spcAft>
+            </a:pPr>
+            <a:r>
+              <a:rPr sz="1200" b="0" i="0">
+                <a:solidFill>
+                  <a:srgbClr val="B4C7D2"/>
+                </a:solidFill>
+                <a:latin typeface="Arial"/>
+              </a:rPr>
+              <a:t>gets the same velocity change toward the</a:t>
+            </a:r>
+          </a:p>
+          <a:p>
+            <a:pPr algn="l">
+              <a:spcAft>
+                <a:spcPts val="0"/>
+              </a:spcAft>
+            </a:pPr>
+            <a:r>
+              <a:rPr sz="1200" b="0" i="0">
+                <a:solidFill>
+                  <a:srgbClr val="B4C7D2"/>
+                </a:solidFill>
+                <a:latin typeface="Arial"/>
+              </a:rPr>
+              <a:t>outlet.</a:t>
+            </a:r>
+          </a:p>
+        </p:txBody>
+      </p:sp>
+      <p:sp>
+        <p:nvSpPr>
+          <p:cNvPr id="52" name="C1-E24 text 50" descr="sci-ppt:o050"/>
+          <p:cNvSpPr txBox="1"/>
+          <p:nvPr/>
+        </p:nvSpPr>
+        <p:spPr>
+          <a:xfrm>
+            <a:off x="457200" y="5669280"/>
+            <a:ext cx="11338560" cy="254889"/>
+          </a:xfrm>
+          <a:prstGeom prst="rect">
+            <a:avLst/>
+          </a:prstGeom>
+          <a:noFill/>
+          <a:effectLst/>
+        </p:spPr>
+        <p:txBody>
+          <a:bodyPr wrap="none" lIns="18288" rIns="18288" tIns="18288" bIns="18288" anchor="t">
+            <a:spAutoFit/>
+          </a:bodyPr>
+          <a:lstStyle/>
+          <a:p>
+            <a:pPr algn="l">
+              <a:spcAft>
+                <a:spcPts val="0"/>
+              </a:spcAft>
+            </a:pPr>
+            <a:r>
+              <a:rPr sz="1350" b="0" i="0">
                 <a:solidFill>
                   <a:srgbClr val="E7F0F3"/>
                 </a:solidFill>
                 <a:latin typeface="Arial"/>
               </a:rPr>
-              <a:t>L</a:t>
-            </a:r>
-          </a:p>
-        </p:txBody>
-      </p:sp>
-      <p:sp>
-        <p:nvSpPr>
-          <p:cNvPr id="13" name="text12" descr="sci-ppt:C1-E24-012"/>
+              <a:t>A constant gradient means uniform acceleration: the whole column leaves the driven end as one plug.</a:t>
+            </a:r>
+          </a:p>
+        </p:txBody>
+      </p:sp>
+      <p:sp>
+        <p:nvSpPr>
+          <p:cNvPr id="53" name="C1-E24 text 51" descr="sci-ppt:o051"/>
           <p:cNvSpPr txBox="1"/>
           <p:nvPr/>
         </p:nvSpPr>
         <p:spPr>
           <a:xfrm>
-            <a:off x="365760" y="5559552"/>
-            <a:ext cx="5547360" cy="321259"/>
+            <a:off x="320040" y="6510528"/>
+            <a:ext cx="11521440" cy="200660"/>
           </a:xfrm>
           <a:prstGeom prst="rect">
             <a:avLst/>
@@ -3494,7 +4902,7 @@
           <a:effectLst/>
         </p:spPr>
         <p:txBody>
-          <a:bodyPr wrap="none" lIns="27432" rIns="27432" tIns="18288" bIns="18288" anchor="ctr">
+          <a:bodyPr wrap="none" lIns="18288" rIns="18288" tIns="18288" bIns="18288" anchor="t">
             <a:spAutoFit/>
           </a:bodyPr>
           <a:lstStyle/>
@@ -3505,253 +4913,13 @@
               </a:spcAft>
             </a:pPr>
             <a:r>
-              <a:rPr sz="1632" b="0" i="0">
-                <a:solidFill>
-                  <a:srgbClr val="E7F0F3"/>
-                </a:solidFill>
-                <a:latin typeface="Arial"/>
-              </a:rPr>
-              <a:t>A₀ = Π₀</a:t>
-            </a:r>
-          </a:p>
-        </p:txBody>
-      </p:sp>
-      <p:sp>
-        <p:nvSpPr>
-          <p:cNvPr id="14" name="text13" descr="sci-ppt:C1-E24-013"/>
-          <p:cNvSpPr txBox="1"/>
-          <p:nvPr/>
-        </p:nvSpPr>
-        <p:spPr>
-          <a:xfrm>
-            <a:off x="365760" y="5852160"/>
-            <a:ext cx="5547360" cy="321259"/>
-          </a:xfrm>
-          <a:prstGeom prst="rect">
-            <a:avLst/>
-          </a:prstGeom>
-          <a:noFill/>
-          <a:effectLst/>
-        </p:spPr>
-        <p:txBody>
-          <a:bodyPr wrap="none" lIns="27432" rIns="27432" tIns="18288" bIns="18288" anchor="ctr">
-            <a:spAutoFit/>
-          </a:bodyPr>
-          <a:lstStyle/>
-          <a:p>
-            <a:pPr algn="l">
-              <a:spcAft>
-                <a:spcPts val="0"/>
-              </a:spcAft>
-            </a:pPr>
-            <a:r>
-              <a:rPr sz="1632" b="0" i="0">
-                <a:solidFill>
-                  <a:srgbClr val="E7F0F3"/>
-                </a:solidFill>
-                <a:latin typeface="Arial"/>
-              </a:rPr>
-              <a:t>ρ</a:t>
-            </a:r>
-          </a:p>
-        </p:txBody>
-      </p:sp>
-      <p:sp>
-        <p:nvSpPr>
-          <p:cNvPr id="15" name="text14" descr="sci-ppt:C1-E24-014"/>
-          <p:cNvSpPr txBox="1"/>
-          <p:nvPr/>
-        </p:nvSpPr>
-        <p:spPr>
-          <a:xfrm>
-            <a:off x="6156960" y="4974336"/>
-            <a:ext cx="5547360" cy="321259"/>
-          </a:xfrm>
-          <a:prstGeom prst="rect">
-            <a:avLst/>
-          </a:prstGeom>
-          <a:noFill/>
-          <a:effectLst/>
-        </p:spPr>
-        <p:txBody>
-          <a:bodyPr wrap="none" lIns="27432" rIns="27432" tIns="18288" bIns="18288" anchor="ctr">
-            <a:spAutoFit/>
-          </a:bodyPr>
-          <a:lstStyle/>
-          <a:p>
-            <a:pPr algn="l">
-              <a:spcAft>
-                <a:spcPts val="0"/>
-              </a:spcAft>
-            </a:pPr>
-            <a:r>
-              <a:rPr sz="1632" b="0" i="0">
-                <a:solidFill>
-                  <a:srgbClr val="E7F0F3"/>
-                </a:solidFill>
-                <a:latin typeface="Arial"/>
-              </a:rPr>
-              <a:t>z = L: Π = 0</a:t>
-            </a:r>
-          </a:p>
-        </p:txBody>
-      </p:sp>
-      <p:sp>
-        <p:nvSpPr>
-          <p:cNvPr id="16" name="text15" descr="sci-ppt:C1-E24-015"/>
-          <p:cNvSpPr txBox="1"/>
-          <p:nvPr/>
-        </p:nvSpPr>
-        <p:spPr>
-          <a:xfrm>
-            <a:off x="6156960" y="5266944"/>
-            <a:ext cx="5547360" cy="321259"/>
-          </a:xfrm>
-          <a:prstGeom prst="rect">
-            <a:avLst/>
-          </a:prstGeom>
-          <a:noFill/>
-          <a:effectLst/>
-        </p:spPr>
-        <p:txBody>
-          <a:bodyPr wrap="none" lIns="27432" rIns="27432" tIns="18288" bIns="18288" anchor="ctr">
-            <a:spAutoFit/>
-          </a:bodyPr>
-          <a:lstStyle/>
-          <a:p>
-            <a:pPr algn="l">
-              <a:spcAft>
-                <a:spcPts val="0"/>
-              </a:spcAft>
-            </a:pPr>
-            <a:r>
-              <a:rPr sz="1632" b="0" i="0">
-                <a:solidFill>
-                  <a:srgbClr val="E7F0F3"/>
-                </a:solidFill>
-                <a:latin typeface="Arial"/>
-              </a:rPr>
-              <a:t>Π(z)</a:t>
-            </a:r>
-          </a:p>
-        </p:txBody>
-      </p:sp>
-      <p:sp>
-        <p:nvSpPr>
-          <p:cNvPr id="17" name="text16" descr="sci-ppt:C1-E24-016"/>
-          <p:cNvSpPr txBox="1"/>
-          <p:nvPr/>
-        </p:nvSpPr>
-        <p:spPr>
-          <a:xfrm>
-            <a:off x="6156960" y="5559552"/>
-            <a:ext cx="5547360" cy="321259"/>
-          </a:xfrm>
-          <a:prstGeom prst="rect">
-            <a:avLst/>
-          </a:prstGeom>
-          <a:noFill/>
-          <a:effectLst/>
-        </p:spPr>
-        <p:txBody>
-          <a:bodyPr wrap="none" lIns="27432" rIns="27432" tIns="18288" bIns="18288" anchor="ctr">
-            <a:spAutoFit/>
-          </a:bodyPr>
-          <a:lstStyle/>
-          <a:p>
-            <a:pPr algn="l">
-              <a:spcAft>
-                <a:spcPts val="0"/>
-              </a:spcAft>
-            </a:pPr>
-            <a:r>
-              <a:rPr sz="1632" b="0" i="0">
-                <a:solidFill>
-                  <a:srgbClr val="E7F0F3"/>
-                </a:solidFill>
-                <a:latin typeface="Arial"/>
-              </a:rPr>
-              <a:t>A₁ = −Π₀/L</a:t>
-            </a:r>
-          </a:p>
-        </p:txBody>
-      </p:sp>
-      <p:sp>
-        <p:nvSpPr>
-          <p:cNvPr id="18" name="text17" descr="sci-ppt:C1-E24-017"/>
-          <p:cNvSpPr txBox="1"/>
-          <p:nvPr/>
-        </p:nvSpPr>
-        <p:spPr>
-          <a:xfrm>
-            <a:off x="6156960" y="5852160"/>
-            <a:ext cx="5547360" cy="321259"/>
-          </a:xfrm>
-          <a:prstGeom prst="rect">
-            <a:avLst/>
-          </a:prstGeom>
-          <a:noFill/>
-          <a:effectLst/>
-        </p:spPr>
-        <p:txBody>
-          <a:bodyPr wrap="none" lIns="27432" rIns="27432" tIns="18288" bIns="18288" anchor="ctr">
-            <a:spAutoFit/>
-          </a:bodyPr>
-          <a:lstStyle/>
-          <a:p>
-            <a:pPr algn="l">
-              <a:spcAft>
-                <a:spcPts val="0"/>
-              </a:spcAft>
-            </a:pPr>
-            <a:r>
-              <a:rPr sz="1632" b="0" i="0">
-                <a:solidFill>
-                  <a:srgbClr val="E7F0F3"/>
-                </a:solidFill>
-                <a:latin typeface="Arial"/>
-              </a:rPr>
-              <a:t>Δuz → outlet</a:t>
-            </a:r>
-          </a:p>
-        </p:txBody>
-      </p:sp>
-      <p:sp>
-        <p:nvSpPr>
-          <p:cNvPr id="19" name="text18" descr="sci-ppt:C1-E24-018"/>
-          <p:cNvSpPr txBox="1"/>
-          <p:nvPr/>
-        </p:nvSpPr>
-        <p:spPr>
-          <a:xfrm>
-            <a:off x="365760" y="6339840"/>
-            <a:ext cx="11277600" cy="302361"/>
-          </a:xfrm>
-          <a:prstGeom prst="rect">
-            <a:avLst/>
-          </a:prstGeom>
-          <a:noFill/>
-          <a:effectLst/>
-        </p:spPr>
-        <p:txBody>
-          <a:bodyPr wrap="none" lIns="27432" rIns="27432" tIns="18288" bIns="18288" anchor="ctr">
-            <a:spAutoFit/>
-          </a:bodyPr>
-          <a:lstStyle/>
-          <a:p>
-            <a:pPr algn="l">
-              <a:spcAft>
-                <a:spcPts val="0"/>
-              </a:spcAft>
-            </a:pPr>
-            <a:r>
-              <a:rPr sz="1536" b="0" i="0">
+              <a:rPr sz="1000" b="0" i="0">
                 <a:solidFill>
                   <a:srgbClr val="B4C7D2"/>
                 </a:solidFill>
                 <a:latin typeface="Arial"/>
               </a:rPr>
-              <a:t>The fixed side walls do not change normal velocity</a:t>
+              <a:t>Boundary values Π(0) = Π₀, Π(L) = 0 (Eq. C1-E24).</a:t>
             </a:r>
           </a:p>
         </p:txBody>

--- a/assets/figures-editable/c1-c2/c1-e24.pptx
+++ b/assets/figures-editable/c1-c2/c1-e24.pptx
@@ -3131,85 +3131,105 @@
                 </a:solidFill>
                 <a:latin typeface="Arial"/>
               </a:rPr>
-              <a:t>C1-E24 · Exact straight-column solution of the reduced model</a:t>
-            </a:r>
-          </a:p>
-        </p:txBody>
-      </p:sp>
-      <p:sp>
-        <p:nvSpPr>
-          <p:cNvPr id="3" name="C1-E24 rect 1" descr="sci-ppt:o001"/>
-          <p:cNvSpPr/>
+              <a:t>C1-E24 · Declared impulse calculation and applicability diagnostics</a:t>
+            </a:r>
+          </a:p>
+        </p:txBody>
+      </p:sp>
+      <p:sp>
+        <p:nvSpPr>
+          <p:cNvPr id="3" name="C1-E24 text 1" descr="sci-ppt:o001"/>
+          <p:cNvSpPr txBox="1"/>
           <p:nvPr/>
         </p:nvSpPr>
         <p:spPr>
           <a:xfrm>
-            <a:off x="1188720" y="1417319"/>
-            <a:ext cx="6400800" cy="640080"/>
+            <a:off x="457200" y="914400"/>
+            <a:ext cx="11247120" cy="262636"/>
           </a:xfrm>
           <a:prstGeom prst="rect">
             <a:avLst/>
           </a:prstGeom>
-          <a:solidFill>
-            <a:srgbClr val="1E4A5A"/>
-          </a:solidFill>
-          <a:ln w="19050">
-            <a:solidFill>
-              <a:srgbClr val="2B6678"/>
-            </a:solidFill>
-          </a:ln>
+          <a:noFill/>
           <a:effectLst/>
         </p:spPr>
         <p:txBody>
-          <a:bodyPr rtlCol="0" anchor="ctr"/>
-          <a:lstStyle/>
-          <a:p>
-            <a:pPr algn="ctr"/>
-          </a:p>
-        </p:txBody>
-      </p:sp>
-      <p:sp>
-        <p:nvSpPr>
-          <p:cNvPr id="4" name="C1-E24 rect 2" descr="sci-ppt:o002"/>
-          <p:cNvSpPr/>
+          <a:bodyPr wrap="none" lIns="18288" rIns="18288" tIns="18288" bIns="18288" anchor="t">
+            <a:spAutoFit/>
+          </a:bodyPr>
+          <a:lstStyle/>
+          <a:p>
+            <a:pPr algn="l">
+              <a:spcAft>
+                <a:spcPts val="0"/>
+              </a:spcAft>
+            </a:pPr>
+            <a:r>
+              <a:rPr sz="1400" b="1" i="0">
+                <a:solidFill>
+                  <a:srgbClr val="8EDBD4"/>
+                </a:solidFill>
+                <a:latin typeface="Arial"/>
+              </a:rPr>
+              <a:t>Time scales of the declared impulse case (log axis, µs)</a:t>
+            </a:r>
+          </a:p>
+        </p:txBody>
+      </p:sp>
+      <p:cxnSp>
+        <p:nvCxnSpPr>
+          <p:cNvPr id="4" name="C1-E24 line 2" descr="sci-ppt:o002"/>
+          <p:cNvCxnSpPr/>
           <p:nvPr/>
-        </p:nvSpPr>
-        <p:spPr>
-          <a:xfrm>
-            <a:off x="1005840" y="1325880"/>
-            <a:ext cx="182880" cy="822960"/>
-          </a:xfrm>
-          <a:prstGeom prst="rect">
+        </p:nvCxnSpPr>
+        <p:spPr>
+          <a:xfrm>
+            <a:off x="914400" y="3108960"/>
+            <a:ext cx="10332720" cy="0"/>
+          </a:xfrm>
+          <a:prstGeom prst="line">
             <a:avLst/>
           </a:prstGeom>
-          <a:solidFill>
-            <a:srgbClr val="3A5362"/>
-          </a:solidFill>
-          <a:ln w="16510">
+          <a:ln w="25400">
             <a:solidFill>
               <a:srgbClr val="B4C7D2"/>
             </a:solidFill>
           </a:ln>
           <a:effectLst/>
         </p:spPr>
-        <p:txBody>
-          <a:bodyPr rtlCol="0" anchor="ctr"/>
-          <a:lstStyle/>
-          <a:p>
-            <a:pPr algn="ctr"/>
-          </a:p>
-        </p:txBody>
-      </p:sp>
-      <p:sp>
-        <p:nvSpPr>
-          <p:cNvPr id="5" name="C1-E24 text 3" descr="sci-ppt:o003"/>
+      </p:cxnSp>
+      <p:cxnSp>
+        <p:nvCxnSpPr>
+          <p:cNvPr id="5" name="C1-E24 line 3" descr="sci-ppt:o003"/>
+          <p:cNvCxnSpPr/>
+          <p:nvPr/>
+        </p:nvCxnSpPr>
+        <p:spPr>
+          <a:xfrm>
+            <a:off x="914400" y="3108960"/>
+            <a:ext cx="0" cy="73152"/>
+          </a:xfrm>
+          <a:prstGeom prst="line">
+            <a:avLst/>
+          </a:prstGeom>
+          <a:ln w="15240">
+            <a:solidFill>
+              <a:srgbClr val="B4C7D2"/>
+            </a:solidFill>
+          </a:ln>
+          <a:effectLst/>
+        </p:spPr>
+      </p:cxnSp>
+      <p:sp>
+        <p:nvSpPr>
+          <p:cNvPr id="6" name="C1-E24 text 4" descr="sci-ppt:o004"/>
           <p:cNvSpPr txBox="1"/>
           <p:nvPr/>
         </p:nvSpPr>
         <p:spPr>
           <a:xfrm>
-            <a:off x="731520" y="868680"/>
-            <a:ext cx="2194560" cy="223900"/>
+            <a:off x="457200" y="3200400"/>
+            <a:ext cx="914400" cy="216153"/>
           </a:xfrm>
           <a:prstGeom prst="rect">
             <a:avLst/>
@@ -3223,33 +3243,55 @@
           </a:bodyPr>
           <a:lstStyle/>
           <a:p>
-            <a:pPr algn="l">
+            <a:pPr algn="ctr">
               <a:spcAft>
                 <a:spcPts val="0"/>
               </a:spcAft>
             </a:pPr>
             <a:r>
-              <a:rPr sz="1150" b="1" i="0">
-                <a:solidFill>
-                  <a:srgbClr val="F2B880"/>
+              <a:rPr sz="1100" b="0" i="0">
+                <a:solidFill>
+                  <a:srgbClr val="B4C7D2"/>
                 </a:solidFill>
                 <a:latin typeface="Arial"/>
               </a:rPr>
-              <a:t>driven end z = 0</a:t>
-            </a:r>
-          </a:p>
-        </p:txBody>
-      </p:sp>
-      <p:sp>
-        <p:nvSpPr>
-          <p:cNvPr id="6" name="C1-E24 text 4" descr="sci-ppt:o004"/>
+              <a:t>10⁻²</a:t>
+            </a:r>
+          </a:p>
+        </p:txBody>
+      </p:sp>
+      <p:cxnSp>
+        <p:nvCxnSpPr>
+          <p:cNvPr id="7" name="C1-E24 line 5" descr="sci-ppt:o005"/>
+          <p:cNvCxnSpPr/>
+          <p:nvPr/>
+        </p:nvCxnSpPr>
+        <p:spPr>
+          <a:xfrm>
+            <a:off x="2390502" y="3108960"/>
+            <a:ext cx="0" cy="73152"/>
+          </a:xfrm>
+          <a:prstGeom prst="line">
+            <a:avLst/>
+          </a:prstGeom>
+          <a:ln w="15240">
+            <a:solidFill>
+              <a:srgbClr val="B4C7D2"/>
+            </a:solidFill>
+          </a:ln>
+          <a:effectLst/>
+        </p:spPr>
+      </p:cxnSp>
+      <p:sp>
+        <p:nvSpPr>
+          <p:cNvPr id="8" name="C1-E24 text 6" descr="sci-ppt:o006"/>
           <p:cNvSpPr txBox="1"/>
           <p:nvPr/>
         </p:nvSpPr>
         <p:spPr>
           <a:xfrm>
-            <a:off x="6126480" y="868680"/>
-            <a:ext cx="2377440" cy="223900"/>
+            <a:off x="1933302" y="3200400"/>
+            <a:ext cx="914400" cy="216153"/>
           </a:xfrm>
           <a:prstGeom prst="rect">
             <a:avLst/>
@@ -3263,119 +3305,85 @@
           </a:bodyPr>
           <a:lstStyle/>
           <a:p>
-            <a:pPr algn="l">
+            <a:pPr algn="ctr">
               <a:spcAft>
                 <a:spcPts val="0"/>
               </a:spcAft>
             </a:pPr>
             <a:r>
-              <a:rPr sz="1150" b="1" i="0">
-                <a:solidFill>
-                  <a:srgbClr val="8EDBD4"/>
+              <a:rPr sz="1100" b="0" i="0">
+                <a:solidFill>
+                  <a:srgbClr val="B4C7D2"/>
                 </a:solidFill>
                 <a:latin typeface="Arial"/>
               </a:rPr>
-              <a:t>outlet z = L</a:t>
+              <a:t>10⁻¹</a:t>
             </a:r>
           </a:p>
         </p:txBody>
       </p:sp>
       <p:cxnSp>
         <p:nvCxnSpPr>
-          <p:cNvPr id="7" name="C1-E24 arrow 5" descr="sci-ppt:o005"/>
+          <p:cNvPr id="9" name="C1-E24 line 7" descr="sci-ppt:o007"/>
           <p:cNvCxnSpPr/>
           <p:nvPr/>
         </p:nvCxnSpPr>
         <p:spPr>
           <a:xfrm>
-            <a:off x="1737360" y="1737360"/>
-            <a:ext cx="822960" cy="0"/>
+            <a:off x="3866605" y="3108960"/>
+            <a:ext cx="0" cy="73152"/>
           </a:xfrm>
           <a:prstGeom prst="line">
             <a:avLst/>
           </a:prstGeom>
-          <a:ln w="38100">
+          <a:ln w="15240">
             <a:solidFill>
-              <a:srgbClr val="8EDBD4"/>
+              <a:srgbClr val="B4C7D2"/>
             </a:solidFill>
-            <a:headEnd type="none" w="med" len="med"/>
-            <a:tailEnd type="triangle" w="med" len="med"/>
           </a:ln>
           <a:effectLst/>
         </p:spPr>
       </p:cxnSp>
-      <p:cxnSp>
-        <p:nvCxnSpPr>
-          <p:cNvPr id="8" name="C1-E24 arrow 6" descr="sci-ppt:o006"/>
-          <p:cNvCxnSpPr/>
+      <p:sp>
+        <p:nvSpPr>
+          <p:cNvPr id="10" name="C1-E24 text 8" descr="sci-ppt:o008"/>
+          <p:cNvSpPr txBox="1"/>
           <p:nvPr/>
-        </p:nvCxnSpPr>
-        <p:spPr>
-          <a:xfrm>
-            <a:off x="3017520" y="1737360"/>
-            <a:ext cx="822960" cy="0"/>
-          </a:xfrm>
-          <a:prstGeom prst="line">
+        </p:nvSpPr>
+        <p:spPr>
+          <a:xfrm>
+            <a:off x="3409405" y="3200400"/>
+            <a:ext cx="914400" cy="216153"/>
+          </a:xfrm>
+          <a:prstGeom prst="rect">
             <a:avLst/>
           </a:prstGeom>
-          <a:ln w="38100">
-            <a:solidFill>
-              <a:srgbClr val="8EDBD4"/>
-            </a:solidFill>
-            <a:headEnd type="none" w="med" len="med"/>
-            <a:tailEnd type="triangle" w="med" len="med"/>
-          </a:ln>
+          <a:noFill/>
           <a:effectLst/>
         </p:spPr>
-      </p:cxnSp>
-      <p:cxnSp>
-        <p:nvCxnSpPr>
-          <p:cNvPr id="9" name="C1-E24 arrow 7" descr="sci-ppt:o007"/>
-          <p:cNvCxnSpPr/>
-          <p:nvPr/>
-        </p:nvCxnSpPr>
-        <p:spPr>
-          <a:xfrm>
-            <a:off x="4297679" y="1737360"/>
-            <a:ext cx="822961" cy="0"/>
-          </a:xfrm>
-          <a:prstGeom prst="line">
-            <a:avLst/>
-          </a:prstGeom>
-          <a:ln w="38100">
-            <a:solidFill>
-              <a:srgbClr val="8EDBD4"/>
-            </a:solidFill>
-            <a:headEnd type="none" w="med" len="med"/>
-            <a:tailEnd type="triangle" w="med" len="med"/>
-          </a:ln>
-          <a:effectLst/>
-        </p:spPr>
-      </p:cxnSp>
-      <p:cxnSp>
-        <p:nvCxnSpPr>
-          <p:cNvPr id="10" name="C1-E24 arrow 8" descr="sci-ppt:o008"/>
-          <p:cNvCxnSpPr/>
-          <p:nvPr/>
-        </p:nvCxnSpPr>
-        <p:spPr>
-          <a:xfrm>
-            <a:off x="5577840" y="1737360"/>
-            <a:ext cx="822960" cy="0"/>
-          </a:xfrm>
-          <a:prstGeom prst="line">
-            <a:avLst/>
-          </a:prstGeom>
-          <a:ln w="38100">
-            <a:solidFill>
-              <a:srgbClr val="8EDBD4"/>
-            </a:solidFill>
-            <a:headEnd type="none" w="med" len="med"/>
-            <a:tailEnd type="triangle" w="med" len="med"/>
-          </a:ln>
-          <a:effectLst/>
-        </p:spPr>
-      </p:cxnSp>
+        <p:txBody>
+          <a:bodyPr wrap="none" lIns="18288" rIns="18288" tIns="18288" bIns="18288" anchor="t">
+            <a:spAutoFit/>
+          </a:bodyPr>
+          <a:lstStyle/>
+          <a:p>
+            <a:pPr algn="ctr">
+              <a:spcAft>
+                <a:spcPts val="0"/>
+              </a:spcAft>
+            </a:pPr>
+            <a:r>
+              <a:rPr sz="1100" b="0" i="0">
+                <a:solidFill>
+                  <a:srgbClr val="B4C7D2"/>
+                </a:solidFill>
+                <a:latin typeface="Arial"/>
+              </a:rPr>
+              <a:t>10⁰</a:t>
+            </a:r>
+          </a:p>
+        </p:txBody>
+      </p:sp>
       <p:cxnSp>
         <p:nvCxnSpPr>
           <p:cNvPr id="11" name="C1-E24 line 9" descr="sci-ppt:o009"/>
@@ -3384,13 +3392,13 @@
         </p:nvCxnSpPr>
         <p:spPr>
           <a:xfrm>
-            <a:off x="1188720" y="2240280"/>
-            <a:ext cx="6400800" cy="0"/>
+            <a:off x="5342708" y="3108960"/>
+            <a:ext cx="0" cy="73152"/>
           </a:xfrm>
           <a:prstGeom prst="line">
             <a:avLst/>
           </a:prstGeom>
-          <a:ln w="16510">
+          <a:ln w="15240">
             <a:solidFill>
               <a:srgbClr val="B4C7D2"/>
             </a:solidFill>
@@ -3398,28 +3406,46 @@
           <a:effectLst/>
         </p:spPr>
       </p:cxnSp>
-      <p:cxnSp>
-        <p:nvCxnSpPr>
-          <p:cNvPr id="12" name="C1-E24 line 10" descr="sci-ppt:o010"/>
-          <p:cNvCxnSpPr/>
+      <p:sp>
+        <p:nvSpPr>
+          <p:cNvPr id="12" name="C1-E24 text 10" descr="sci-ppt:o010"/>
+          <p:cNvSpPr txBox="1"/>
           <p:nvPr/>
-        </p:nvCxnSpPr>
-        <p:spPr>
-          <a:xfrm>
-            <a:off x="1188720" y="2176272"/>
-            <a:ext cx="0" cy="128016"/>
-          </a:xfrm>
-          <a:prstGeom prst="line">
+        </p:nvSpPr>
+        <p:spPr>
+          <a:xfrm>
+            <a:off x="4885508" y="3200400"/>
+            <a:ext cx="914400" cy="216153"/>
+          </a:xfrm>
+          <a:prstGeom prst="rect">
             <a:avLst/>
           </a:prstGeom>
-          <a:ln w="16510">
-            <a:solidFill>
-              <a:srgbClr val="B4C7D2"/>
-            </a:solidFill>
-          </a:ln>
+          <a:noFill/>
           <a:effectLst/>
         </p:spPr>
-      </p:cxnSp>
+        <p:txBody>
+          <a:bodyPr wrap="none" lIns="18288" rIns="18288" tIns="18288" bIns="18288" anchor="t">
+            <a:spAutoFit/>
+          </a:bodyPr>
+          <a:lstStyle/>
+          <a:p>
+            <a:pPr algn="ctr">
+              <a:spcAft>
+                <a:spcPts val="0"/>
+              </a:spcAft>
+            </a:pPr>
+            <a:r>
+              <a:rPr sz="1100" b="0" i="0">
+                <a:solidFill>
+                  <a:srgbClr val="B4C7D2"/>
+                </a:solidFill>
+                <a:latin typeface="Arial"/>
+              </a:rPr>
+              <a:t>10¹</a:t>
+            </a:r>
+          </a:p>
+        </p:txBody>
+      </p:sp>
       <p:cxnSp>
         <p:nvCxnSpPr>
           <p:cNvPr id="13" name="C1-E24 line 11" descr="sci-ppt:o011"/>
@@ -3428,13 +3454,13 @@
         </p:nvCxnSpPr>
         <p:spPr>
           <a:xfrm>
-            <a:off x="7589520" y="2176272"/>
-            <a:ext cx="0" cy="128016"/>
+            <a:off x="6818811" y="3108960"/>
+            <a:ext cx="0" cy="73152"/>
           </a:xfrm>
           <a:prstGeom prst="line">
             <a:avLst/>
           </a:prstGeom>
-          <a:ln w="16510">
+          <a:ln w="15240">
             <a:solidFill>
               <a:srgbClr val="B4C7D2"/>
             </a:solidFill>
@@ -3450,8 +3476,8 @@
         </p:nvSpPr>
         <p:spPr>
           <a:xfrm>
-            <a:off x="3474720" y="2317242"/>
-            <a:ext cx="1828800" cy="223900"/>
+            <a:off x="6361611" y="3200400"/>
+            <a:ext cx="914400" cy="216153"/>
           </a:xfrm>
           <a:prstGeom prst="rect">
             <a:avLst/>
@@ -3471,13 +3497,13 @@
               </a:spcAft>
             </a:pPr>
             <a:r>
-              <a:rPr sz="1150" b="0" i="0">
+              <a:rPr sz="1100" b="0" i="0">
                 <a:solidFill>
                   <a:srgbClr val="B4C7D2"/>
                 </a:solidFill>
                 <a:latin typeface="Arial"/>
               </a:rPr>
-              <a:t>L = 100 µm</a:t>
+              <a:t>10²</a:t>
             </a:r>
           </a:p>
         </p:txBody>
@@ -3490,13 +3516,13 @@
         </p:nvCxnSpPr>
         <p:spPr>
           <a:xfrm>
-            <a:off x="1188720" y="5029200"/>
-            <a:ext cx="6400800" cy="0"/>
+            <a:off x="8294914" y="3108960"/>
+            <a:ext cx="0" cy="73152"/>
           </a:xfrm>
           <a:prstGeom prst="line">
             <a:avLst/>
           </a:prstGeom>
-          <a:ln w="19050">
+          <a:ln w="15240">
             <a:solidFill>
               <a:srgbClr val="B4C7D2"/>
             </a:solidFill>
@@ -3504,28 +3530,46 @@
           <a:effectLst/>
         </p:spPr>
       </p:cxnSp>
-      <p:cxnSp>
-        <p:nvCxnSpPr>
-          <p:cNvPr id="16" name="C1-E24 line 14" descr="sci-ppt:o014"/>
-          <p:cNvCxnSpPr/>
+      <p:sp>
+        <p:nvSpPr>
+          <p:cNvPr id="16" name="C1-E24 text 14" descr="sci-ppt:o014"/>
+          <p:cNvSpPr txBox="1"/>
           <p:nvPr/>
-        </p:nvCxnSpPr>
-        <p:spPr>
-          <a:xfrm>
-            <a:off x="1188720" y="2743200"/>
-            <a:ext cx="0" cy="2286000"/>
-          </a:xfrm>
-          <a:prstGeom prst="line">
+        </p:nvSpPr>
+        <p:spPr>
+          <a:xfrm>
+            <a:off x="7837714" y="3200400"/>
+            <a:ext cx="914400" cy="216153"/>
+          </a:xfrm>
+          <a:prstGeom prst="rect">
             <a:avLst/>
           </a:prstGeom>
-          <a:ln w="19050">
-            <a:solidFill>
-              <a:srgbClr val="B4C7D2"/>
-            </a:solidFill>
-          </a:ln>
+          <a:noFill/>
           <a:effectLst/>
         </p:spPr>
-      </p:cxnSp>
+        <p:txBody>
+          <a:bodyPr wrap="none" lIns="18288" rIns="18288" tIns="18288" bIns="18288" anchor="t">
+            <a:spAutoFit/>
+          </a:bodyPr>
+          <a:lstStyle/>
+          <a:p>
+            <a:pPr algn="ctr">
+              <a:spcAft>
+                <a:spcPts val="0"/>
+              </a:spcAft>
+            </a:pPr>
+            <a:r>
+              <a:rPr sz="1100" b="0" i="0">
+                <a:solidFill>
+                  <a:srgbClr val="B4C7D2"/>
+                </a:solidFill>
+                <a:latin typeface="Arial"/>
+              </a:rPr>
+              <a:t>10³</a:t>
+            </a:r>
+          </a:p>
+        </p:txBody>
+      </p:sp>
       <p:cxnSp>
         <p:nvCxnSpPr>
           <p:cNvPr id="17" name="C1-E24 line 15" descr="sci-ppt:o015"/>
@@ -3534,13 +3578,13 @@
         </p:nvCxnSpPr>
         <p:spPr>
           <a:xfrm>
-            <a:off x="1188720" y="5029200"/>
-            <a:ext cx="0" cy="64008"/>
+            <a:off x="9771017" y="3108960"/>
+            <a:ext cx="0" cy="73152"/>
           </a:xfrm>
           <a:prstGeom prst="line">
             <a:avLst/>
           </a:prstGeom>
-          <a:ln w="12700">
+          <a:ln w="15240">
             <a:solidFill>
               <a:srgbClr val="B4C7D2"/>
             </a:solidFill>
@@ -3548,38 +3592,16 @@
           <a:effectLst/>
         </p:spPr>
       </p:cxnSp>
-      <p:cxnSp>
-        <p:nvCxnSpPr>
-          <p:cNvPr id="18" name="C1-E24 line 16" descr="sci-ppt:o016"/>
-          <p:cNvCxnSpPr/>
-          <p:nvPr/>
-        </p:nvCxnSpPr>
-        <p:spPr>
-          <a:xfrm>
-            <a:off x="1188720" y="2743200"/>
-            <a:ext cx="0" cy="2286000"/>
-          </a:xfrm>
-          <a:prstGeom prst="line">
-            <a:avLst/>
-          </a:prstGeom>
-          <a:ln w="7620">
-            <a:solidFill>
-              <a:srgbClr val="2E4756"/>
-            </a:solidFill>
-          </a:ln>
-          <a:effectLst/>
-        </p:spPr>
-      </p:cxnSp>
-      <p:sp>
-        <p:nvSpPr>
-          <p:cNvPr id="19" name="C1-E24 text 17" descr="sci-ppt:o017"/>
+      <p:sp>
+        <p:nvSpPr>
+          <p:cNvPr id="18" name="C1-E24 text 16" descr="sci-ppt:o016"/>
           <p:cNvSpPr txBox="1"/>
           <p:nvPr/>
         </p:nvSpPr>
         <p:spPr>
           <a:xfrm>
-            <a:off x="731520" y="5111496"/>
-            <a:ext cx="914400" cy="208407"/>
+            <a:off x="9313817" y="3200400"/>
+            <a:ext cx="914400" cy="216153"/>
           </a:xfrm>
           <a:prstGeom prst="rect">
             <a:avLst/>
@@ -3599,32 +3621,32 @@
               </a:spcAft>
             </a:pPr>
             <a:r>
-              <a:rPr sz="1050" b="0" i="0">
+              <a:rPr sz="1100" b="0" i="0">
                 <a:solidFill>
                   <a:srgbClr val="B4C7D2"/>
                 </a:solidFill>
                 <a:latin typeface="Arial"/>
               </a:rPr>
-              <a:t>0.00</a:t>
+              <a:t>10⁴</a:t>
             </a:r>
           </a:p>
         </p:txBody>
       </p:sp>
       <p:cxnSp>
         <p:nvCxnSpPr>
-          <p:cNvPr id="20" name="C1-E24 line 18" descr="sci-ppt:o018"/>
+          <p:cNvPr id="19" name="C1-E24 line 17" descr="sci-ppt:o017"/>
           <p:cNvCxnSpPr/>
           <p:nvPr/>
         </p:nvCxnSpPr>
         <p:spPr>
           <a:xfrm>
-            <a:off x="2788920" y="5029200"/>
-            <a:ext cx="0" cy="64008"/>
+            <a:off x="11247120" y="3108960"/>
+            <a:ext cx="0" cy="73152"/>
           </a:xfrm>
           <a:prstGeom prst="line">
             <a:avLst/>
           </a:prstGeom>
-          <a:ln w="12700">
+          <a:ln w="15240">
             <a:solidFill>
               <a:srgbClr val="B4C7D2"/>
             </a:solidFill>
@@ -3632,6 +3654,46 @@
           <a:effectLst/>
         </p:spPr>
       </p:cxnSp>
+      <p:sp>
+        <p:nvSpPr>
+          <p:cNvPr id="20" name="C1-E24 text 18" descr="sci-ppt:o018"/>
+          <p:cNvSpPr txBox="1"/>
+          <p:nvPr/>
+        </p:nvSpPr>
+        <p:spPr>
+          <a:xfrm>
+            <a:off x="10789920" y="3200400"/>
+            <a:ext cx="914400" cy="216153"/>
+          </a:xfrm>
+          <a:prstGeom prst="rect">
+            <a:avLst/>
+          </a:prstGeom>
+          <a:noFill/>
+          <a:effectLst/>
+        </p:spPr>
+        <p:txBody>
+          <a:bodyPr wrap="none" lIns="18288" rIns="18288" tIns="18288" bIns="18288" anchor="t">
+            <a:spAutoFit/>
+          </a:bodyPr>
+          <a:lstStyle/>
+          <a:p>
+            <a:pPr algn="ctr">
+              <a:spcAft>
+                <a:spcPts val="0"/>
+              </a:spcAft>
+            </a:pPr>
+            <a:r>
+              <a:rPr sz="1100" b="0" i="0">
+                <a:solidFill>
+                  <a:srgbClr val="B4C7D2"/>
+                </a:solidFill>
+                <a:latin typeface="Arial"/>
+              </a:rPr>
+              <a:t>10⁵</a:t>
+            </a:r>
+          </a:p>
+        </p:txBody>
+      </p:sp>
       <p:cxnSp>
         <p:nvCxnSpPr>
           <p:cNvPr id="21" name="C1-E24 line 19" descr="sci-ppt:o019"/>
@@ -3639,16 +3701,16 @@
           <p:nvPr/>
         </p:nvCxnSpPr>
         <p:spPr>
-          <a:xfrm>
-            <a:off x="2788920" y="2743200"/>
-            <a:ext cx="0" cy="2286000"/>
+          <a:xfrm flipV="1">
+            <a:off x="2130894" y="2834640"/>
+            <a:ext cx="0" cy="274320"/>
           </a:xfrm>
           <a:prstGeom prst="line">
             <a:avLst/>
           </a:prstGeom>
-          <a:ln w="7620">
+          <a:ln w="27940">
             <a:solidFill>
-              <a:srgbClr val="2E4756"/>
+              <a:srgbClr val="7FC8F8"/>
             </a:solidFill>
           </a:ln>
           <a:effectLst/>
@@ -3656,14 +3718,46 @@
       </p:cxnSp>
       <p:sp>
         <p:nvSpPr>
-          <p:cNvPr id="22" name="C1-E24 text 20" descr="sci-ppt:o020"/>
+          <p:cNvPr id="22" name="C1-E24 ellipse 20" descr="sci-ppt:o020"/>
+          <p:cNvSpPr/>
+          <p:nvPr/>
+        </p:nvSpPr>
+        <p:spPr>
+          <a:xfrm>
+            <a:off x="2048598" y="3026664"/>
+            <a:ext cx="164592" cy="164592"/>
+          </a:xfrm>
+          <a:prstGeom prst="ellipse">
+            <a:avLst/>
+          </a:prstGeom>
+          <a:solidFill>
+            <a:srgbClr val="7FC8F8"/>
+          </a:solidFill>
+          <a:ln w="12700">
+            <a:solidFill>
+              <a:srgbClr val="7FC8F8"/>
+            </a:solidFill>
+          </a:ln>
+          <a:effectLst/>
+        </p:spPr>
+        <p:txBody>
+          <a:bodyPr rtlCol="0" anchor="ctr"/>
+          <a:lstStyle/>
+          <a:p>
+            <a:pPr algn="ctr"/>
+          </a:p>
+        </p:txBody>
+      </p:sp>
+      <p:sp>
+        <p:nvSpPr>
+          <p:cNvPr id="23" name="C1-E24 text 21" descr="sci-ppt:o021"/>
           <p:cNvSpPr txBox="1"/>
           <p:nvPr/>
         </p:nvSpPr>
         <p:spPr>
           <a:xfrm>
-            <a:off x="2331720" y="5111496"/>
-            <a:ext cx="914400" cy="208407"/>
+            <a:off x="1033614" y="2148840"/>
+            <a:ext cx="2194560" cy="417576"/>
           </a:xfrm>
           <a:prstGeom prst="rect">
             <a:avLst/>
@@ -3683,39 +3777,33 @@
               </a:spcAft>
             </a:pPr>
             <a:r>
-              <a:rPr sz="1050" b="0" i="0">
-                <a:solidFill>
-                  <a:srgbClr val="B4C7D2"/>
+              <a:rPr sz="1200" b="1" i="0">
+                <a:solidFill>
+                  <a:srgbClr val="7FC8F8"/>
                 </a:solidFill>
                 <a:latin typeface="Arial"/>
               </a:rPr>
-              <a:t>0.25</a:t>
-            </a:r>
-          </a:p>
-        </p:txBody>
-      </p:sp>
-      <p:cxnSp>
-        <p:nvCxnSpPr>
-          <p:cNvPr id="23" name="C1-E24 line 21" descr="sci-ppt:o021"/>
-          <p:cNvCxnSpPr/>
-          <p:nvPr/>
-        </p:nvCxnSpPr>
-        <p:spPr>
-          <a:xfrm>
-            <a:off x="4389120" y="5029200"/>
-            <a:ext cx="0" cy="64008"/>
-          </a:xfrm>
-          <a:prstGeom prst="line">
-            <a:avLst/>
-          </a:prstGeom>
-          <a:ln w="12700">
-            <a:solidFill>
-              <a:srgbClr val="B4C7D2"/>
-            </a:solidFill>
-          </a:ln>
-          <a:effectLst/>
-        </p:spPr>
-      </p:cxnSp>
+              <a:t>acoustic crossing</a:t>
+            </a:r>
+          </a:p>
+          <a:p>
+            <a:pPr algn="ctr">
+              <a:spcAft>
+                <a:spcPts val="0"/>
+              </a:spcAft>
+            </a:pPr>
+            <a:r>
+              <a:rPr sz="1200" b="1" i="0">
+                <a:solidFill>
+                  <a:srgbClr val="7FC8F8"/>
+                </a:solidFill>
+                <a:latin typeface="Arial"/>
+              </a:rPr>
+              <a:t>tₐ = L/c = 0.067 µs</a:t>
+            </a:r>
+          </a:p>
+        </p:txBody>
+      </p:sp>
       <p:cxnSp>
         <p:nvCxnSpPr>
           <p:cNvPr id="24" name="C1-E24 line 22" descr="sci-ppt:o022"/>
@@ -3723,16 +3811,16 @@
           <p:nvPr/>
         </p:nvCxnSpPr>
         <p:spPr>
-          <a:xfrm>
-            <a:off x="4389120" y="2743200"/>
-            <a:ext cx="0" cy="2286000"/>
+          <a:xfrm flipV="1">
+            <a:off x="3422254" y="2103120"/>
+            <a:ext cx="0" cy="1005840"/>
           </a:xfrm>
           <a:prstGeom prst="line">
             <a:avLst/>
           </a:prstGeom>
-          <a:ln w="7620">
+          <a:ln w="27940">
             <a:solidFill>
-              <a:srgbClr val="2E4756"/>
+              <a:srgbClr val="8EDBD4"/>
             </a:solidFill>
           </a:ln>
           <a:effectLst/>
@@ -3740,14 +3828,46 @@
       </p:cxnSp>
       <p:sp>
         <p:nvSpPr>
-          <p:cNvPr id="25" name="C1-E24 text 23" descr="sci-ppt:o023"/>
+          <p:cNvPr id="25" name="C1-E24 ellipse 23" descr="sci-ppt:o023"/>
+          <p:cNvSpPr/>
+          <p:nvPr/>
+        </p:nvSpPr>
+        <p:spPr>
+          <a:xfrm>
+            <a:off x="3339958" y="3026664"/>
+            <a:ext cx="164592" cy="164592"/>
+          </a:xfrm>
+          <a:prstGeom prst="ellipse">
+            <a:avLst/>
+          </a:prstGeom>
+          <a:solidFill>
+            <a:srgbClr val="8EDBD4"/>
+          </a:solidFill>
+          <a:ln w="12700">
+            <a:solidFill>
+              <a:srgbClr val="8EDBD4"/>
+            </a:solidFill>
+          </a:ln>
+          <a:effectLst/>
+        </p:spPr>
+        <p:txBody>
+          <a:bodyPr rtlCol="0" anchor="ctr"/>
+          <a:lstStyle/>
+          <a:p>
+            <a:pPr algn="ctr"/>
+          </a:p>
+        </p:txBody>
+      </p:sp>
+      <p:sp>
+        <p:nvSpPr>
+          <p:cNvPr id="26" name="C1-E24 text 24" descr="sci-ppt:o024"/>
           <p:cNvSpPr txBox="1"/>
           <p:nvPr/>
         </p:nvSpPr>
         <p:spPr>
           <a:xfrm>
-            <a:off x="3931920" y="5111496"/>
-            <a:ext cx="914400" cy="208407"/>
+            <a:off x="2324974" y="1417320"/>
+            <a:ext cx="2194560" cy="417576"/>
           </a:xfrm>
           <a:prstGeom prst="rect">
             <a:avLst/>
@@ -3767,39 +3887,33 @@
               </a:spcAft>
             </a:pPr>
             <a:r>
-              <a:rPr sz="1050" b="0" i="0">
-                <a:solidFill>
-                  <a:srgbClr val="B4C7D2"/>
+              <a:rPr sz="1200" b="1" i="0">
+                <a:solidFill>
+                  <a:srgbClr val="8EDBD4"/>
                 </a:solidFill>
                 <a:latin typeface="Arial"/>
               </a:rPr>
-              <a:t>0.50</a:t>
-            </a:r>
-          </a:p>
-        </p:txBody>
-      </p:sp>
-      <p:cxnSp>
-        <p:nvCxnSpPr>
-          <p:cNvPr id="26" name="C1-E24 line 24" descr="sci-ppt:o024"/>
-          <p:cNvCxnSpPr/>
-          <p:nvPr/>
-        </p:nvCxnSpPr>
-        <p:spPr>
-          <a:xfrm>
-            <a:off x="5989320" y="5029200"/>
-            <a:ext cx="0" cy="64008"/>
-          </a:xfrm>
-          <a:prstGeom prst="line">
-            <a:avLst/>
-          </a:prstGeom>
-          <a:ln w="12700">
-            <a:solidFill>
-              <a:srgbClr val="B4C7D2"/>
-            </a:solidFill>
-          </a:ln>
-          <a:effectLst/>
-        </p:spPr>
-      </p:cxnSp>
+              <a:t>pulse duration</a:t>
+            </a:r>
+          </a:p>
+          <a:p>
+            <a:pPr algn="ctr">
+              <a:spcAft>
+                <a:spcPts val="0"/>
+              </a:spcAft>
+            </a:pPr>
+            <a:r>
+              <a:rPr sz="1200" b="1" i="0">
+                <a:solidFill>
+                  <a:srgbClr val="8EDBD4"/>
+                </a:solidFill>
+                <a:latin typeface="Arial"/>
+              </a:rPr>
+              <a:t>τ = 0.5 µs</a:t>
+            </a:r>
+          </a:p>
+        </p:txBody>
+      </p:sp>
       <p:cxnSp>
         <p:nvCxnSpPr>
           <p:cNvPr id="27" name="C1-E24 line 25" descr="sci-ppt:o025"/>
@@ -3807,613 +3921,31 @@
           <p:nvPr/>
         </p:nvCxnSpPr>
         <p:spPr>
-          <a:xfrm>
-            <a:off x="5989320" y="2743200"/>
-            <a:ext cx="0" cy="2286000"/>
+          <a:xfrm flipV="1">
+            <a:off x="6113889" y="2834640"/>
+            <a:ext cx="0" cy="274320"/>
           </a:xfrm>
           <a:prstGeom prst="line">
             <a:avLst/>
           </a:prstGeom>
-          <a:ln w="7620">
-            <a:solidFill>
-              <a:srgbClr val="2E4756"/>
-            </a:solidFill>
-          </a:ln>
-          <a:effectLst/>
-        </p:spPr>
-      </p:cxnSp>
-      <p:sp>
-        <p:nvSpPr>
-          <p:cNvPr id="28" name="C1-E24 text 26" descr="sci-ppt:o026"/>
-          <p:cNvSpPr txBox="1"/>
-          <p:nvPr/>
-        </p:nvSpPr>
-        <p:spPr>
-          <a:xfrm>
-            <a:off x="5532120" y="5111496"/>
-            <a:ext cx="914400" cy="208407"/>
-          </a:xfrm>
-          <a:prstGeom prst="rect">
-            <a:avLst/>
-          </a:prstGeom>
-          <a:noFill/>
-          <a:effectLst/>
-        </p:spPr>
-        <p:txBody>
-          <a:bodyPr wrap="none" lIns="18288" rIns="18288" tIns="18288" bIns="18288" anchor="t">
-            <a:spAutoFit/>
-          </a:bodyPr>
-          <a:lstStyle/>
-          <a:p>
-            <a:pPr algn="ctr">
-              <a:spcAft>
-                <a:spcPts val="0"/>
-              </a:spcAft>
-            </a:pPr>
-            <a:r>
-              <a:rPr sz="1050" b="0" i="0">
-                <a:solidFill>
-                  <a:srgbClr val="B4C7D2"/>
-                </a:solidFill>
-                <a:latin typeface="Arial"/>
-              </a:rPr>
-              <a:t>0.75</a:t>
-            </a:r>
-          </a:p>
-        </p:txBody>
-      </p:sp>
-      <p:cxnSp>
-        <p:nvCxnSpPr>
-          <p:cNvPr id="29" name="C1-E24 line 27" descr="sci-ppt:o027"/>
-          <p:cNvCxnSpPr/>
-          <p:nvPr/>
-        </p:nvCxnSpPr>
-        <p:spPr>
-          <a:xfrm>
-            <a:off x="7589520" y="5029200"/>
-            <a:ext cx="0" cy="64008"/>
-          </a:xfrm>
-          <a:prstGeom prst="line">
-            <a:avLst/>
-          </a:prstGeom>
-          <a:ln w="12700">
-            <a:solidFill>
-              <a:srgbClr val="B4C7D2"/>
-            </a:solidFill>
-          </a:ln>
-          <a:effectLst/>
-        </p:spPr>
-      </p:cxnSp>
-      <p:cxnSp>
-        <p:nvCxnSpPr>
-          <p:cNvPr id="30" name="C1-E24 line 28" descr="sci-ppt:o028"/>
-          <p:cNvCxnSpPr/>
-          <p:nvPr/>
-        </p:nvCxnSpPr>
-        <p:spPr>
-          <a:xfrm>
-            <a:off x="7589520" y="2743200"/>
-            <a:ext cx="0" cy="2286000"/>
-          </a:xfrm>
-          <a:prstGeom prst="line">
-            <a:avLst/>
-          </a:prstGeom>
-          <a:ln w="7620">
-            <a:solidFill>
-              <a:srgbClr val="2E4756"/>
-            </a:solidFill>
-          </a:ln>
-          <a:effectLst/>
-        </p:spPr>
-      </p:cxnSp>
-      <p:sp>
-        <p:nvSpPr>
-          <p:cNvPr id="31" name="C1-E24 text 29" descr="sci-ppt:o029"/>
-          <p:cNvSpPr txBox="1"/>
-          <p:nvPr/>
-        </p:nvSpPr>
-        <p:spPr>
-          <a:xfrm>
-            <a:off x="7132320" y="5111496"/>
-            <a:ext cx="914400" cy="208407"/>
-          </a:xfrm>
-          <a:prstGeom prst="rect">
-            <a:avLst/>
-          </a:prstGeom>
-          <a:noFill/>
-          <a:effectLst/>
-        </p:spPr>
-        <p:txBody>
-          <a:bodyPr wrap="none" lIns="18288" rIns="18288" tIns="18288" bIns="18288" anchor="t">
-            <a:spAutoFit/>
-          </a:bodyPr>
-          <a:lstStyle/>
-          <a:p>
-            <a:pPr algn="ctr">
-              <a:spcAft>
-                <a:spcPts val="0"/>
-              </a:spcAft>
-            </a:pPr>
-            <a:r>
-              <a:rPr sz="1050" b="0" i="0">
-                <a:solidFill>
-                  <a:srgbClr val="B4C7D2"/>
-                </a:solidFill>
-                <a:latin typeface="Arial"/>
-              </a:rPr>
-              <a:t>1.00</a:t>
-            </a:r>
-          </a:p>
-        </p:txBody>
-      </p:sp>
-      <p:cxnSp>
-        <p:nvCxnSpPr>
-          <p:cNvPr id="32" name="C1-E24 line 30" descr="sci-ppt:o030"/>
-          <p:cNvCxnSpPr/>
-          <p:nvPr/>
-        </p:nvCxnSpPr>
-        <p:spPr>
-          <a:xfrm>
-            <a:off x="1124712" y="5029200"/>
-            <a:ext cx="64008" cy="0"/>
-          </a:xfrm>
-          <a:prstGeom prst="line">
-            <a:avLst/>
-          </a:prstGeom>
-          <a:ln w="12700">
-            <a:solidFill>
-              <a:srgbClr val="B4C7D2"/>
-            </a:solidFill>
-          </a:ln>
-          <a:effectLst/>
-        </p:spPr>
-      </p:cxnSp>
-      <p:cxnSp>
-        <p:nvCxnSpPr>
-          <p:cNvPr id="33" name="C1-E24 line 31" descr="sci-ppt:o031"/>
-          <p:cNvCxnSpPr/>
-          <p:nvPr/>
-        </p:nvCxnSpPr>
-        <p:spPr>
-          <a:xfrm>
-            <a:off x="1124712" y="3990109"/>
-            <a:ext cx="64008" cy="0"/>
-          </a:xfrm>
-          <a:prstGeom prst="line">
-            <a:avLst/>
-          </a:prstGeom>
-          <a:ln w="12700">
-            <a:solidFill>
-              <a:srgbClr val="B4C7D2"/>
-            </a:solidFill>
-          </a:ln>
-          <a:effectLst/>
-        </p:spPr>
-      </p:cxnSp>
-      <p:cxnSp>
-        <p:nvCxnSpPr>
-          <p:cNvPr id="34" name="C1-E24 line 32" descr="sci-ppt:o032"/>
-          <p:cNvCxnSpPr/>
-          <p:nvPr/>
-        </p:nvCxnSpPr>
-        <p:spPr>
-          <a:xfrm>
-            <a:off x="1188720" y="3990109"/>
-            <a:ext cx="6400800" cy="0"/>
-          </a:xfrm>
-          <a:prstGeom prst="line">
-            <a:avLst/>
-          </a:prstGeom>
-          <a:ln w="7620">
-            <a:solidFill>
-              <a:srgbClr val="2E4756"/>
-            </a:solidFill>
-          </a:ln>
-          <a:effectLst/>
-        </p:spPr>
-      </p:cxnSp>
-      <p:sp>
-        <p:nvSpPr>
-          <p:cNvPr id="35" name="C1-E24 text 33" descr="sci-ppt:o033"/>
-          <p:cNvSpPr txBox="1"/>
-          <p:nvPr/>
-        </p:nvSpPr>
-        <p:spPr>
-          <a:xfrm>
-            <a:off x="320040" y="3907813"/>
-            <a:ext cx="777240" cy="208407"/>
-          </a:xfrm>
-          <a:prstGeom prst="rect">
-            <a:avLst/>
-          </a:prstGeom>
-          <a:noFill/>
-          <a:effectLst/>
-        </p:spPr>
-        <p:txBody>
-          <a:bodyPr wrap="none" lIns="18288" rIns="18288" tIns="18288" bIns="18288" anchor="t">
-            <a:spAutoFit/>
-          </a:bodyPr>
-          <a:lstStyle/>
-          <a:p>
-            <a:pPr algn="r">
-              <a:spcAft>
-                <a:spcPts val="0"/>
-              </a:spcAft>
-            </a:pPr>
-            <a:r>
-              <a:rPr sz="1050" b="0" i="0">
-                <a:solidFill>
-                  <a:srgbClr val="B4C7D2"/>
-                </a:solidFill>
-                <a:latin typeface="Arial"/>
-              </a:rPr>
-              <a:t>0.5</a:t>
-            </a:r>
-          </a:p>
-        </p:txBody>
-      </p:sp>
-      <p:cxnSp>
-        <p:nvCxnSpPr>
-          <p:cNvPr id="36" name="C1-E24 line 34" descr="sci-ppt:o034"/>
-          <p:cNvCxnSpPr/>
-          <p:nvPr/>
-        </p:nvCxnSpPr>
-        <p:spPr>
-          <a:xfrm>
-            <a:off x="1124712" y="2951018"/>
-            <a:ext cx="64008" cy="0"/>
-          </a:xfrm>
-          <a:prstGeom prst="line">
-            <a:avLst/>
-          </a:prstGeom>
-          <a:ln w="12700">
-            <a:solidFill>
-              <a:srgbClr val="B4C7D2"/>
-            </a:solidFill>
-          </a:ln>
-          <a:effectLst/>
-        </p:spPr>
-      </p:cxnSp>
-      <p:cxnSp>
-        <p:nvCxnSpPr>
-          <p:cNvPr id="37" name="C1-E24 line 35" descr="sci-ppt:o035"/>
-          <p:cNvCxnSpPr/>
-          <p:nvPr/>
-        </p:nvCxnSpPr>
-        <p:spPr>
-          <a:xfrm>
-            <a:off x="1188720" y="2951018"/>
-            <a:ext cx="6400800" cy="0"/>
-          </a:xfrm>
-          <a:prstGeom prst="line">
-            <a:avLst/>
-          </a:prstGeom>
-          <a:ln w="7620">
-            <a:solidFill>
-              <a:srgbClr val="2E4756"/>
-            </a:solidFill>
-          </a:ln>
-          <a:effectLst/>
-        </p:spPr>
-      </p:cxnSp>
-      <p:sp>
-        <p:nvSpPr>
-          <p:cNvPr id="38" name="C1-E24 text 36" descr="sci-ppt:o036"/>
-          <p:cNvSpPr txBox="1"/>
-          <p:nvPr/>
-        </p:nvSpPr>
-        <p:spPr>
-          <a:xfrm>
-            <a:off x="320040" y="2868722"/>
-            <a:ext cx="777240" cy="208407"/>
-          </a:xfrm>
-          <a:prstGeom prst="rect">
-            <a:avLst/>
-          </a:prstGeom>
-          <a:noFill/>
-          <a:effectLst/>
-        </p:spPr>
-        <p:txBody>
-          <a:bodyPr wrap="none" lIns="18288" rIns="18288" tIns="18288" bIns="18288" anchor="t">
-            <a:spAutoFit/>
-          </a:bodyPr>
-          <a:lstStyle/>
-          <a:p>
-            <a:pPr algn="r">
-              <a:spcAft>
-                <a:spcPts val="0"/>
-              </a:spcAft>
-            </a:pPr>
-            <a:r>
-              <a:rPr sz="1050" b="0" i="0">
-                <a:solidFill>
-                  <a:srgbClr val="B4C7D2"/>
-                </a:solidFill>
-                <a:latin typeface="Arial"/>
-              </a:rPr>
-              <a:t>1.0</a:t>
-            </a:r>
-          </a:p>
-        </p:txBody>
-      </p:sp>
-      <p:sp>
-        <p:nvSpPr>
-          <p:cNvPr id="39" name="C1-E24 text 37" descr="sci-ppt:o037"/>
-          <p:cNvSpPr txBox="1"/>
-          <p:nvPr/>
-        </p:nvSpPr>
-        <p:spPr>
-          <a:xfrm>
-            <a:off x="1188720" y="5312664"/>
-            <a:ext cx="6400800" cy="231648"/>
-          </a:xfrm>
-          <a:prstGeom prst="rect">
-            <a:avLst/>
-          </a:prstGeom>
-          <a:noFill/>
-          <a:effectLst/>
-        </p:spPr>
-        <p:txBody>
-          <a:bodyPr wrap="none" lIns="18288" rIns="18288" tIns="18288" bIns="18288" anchor="t">
-            <a:spAutoFit/>
-          </a:bodyPr>
-          <a:lstStyle/>
-          <a:p>
-            <a:pPr algn="ctr">
-              <a:spcAft>
-                <a:spcPts val="0"/>
-              </a:spcAft>
-            </a:pPr>
-            <a:r>
-              <a:rPr sz="1200" b="0" i="0">
-                <a:solidFill>
-                  <a:srgbClr val="E7F0F3"/>
-                </a:solidFill>
-                <a:latin typeface="Arial"/>
-              </a:rPr>
-              <a:t>z / L</a:t>
-            </a:r>
-          </a:p>
-        </p:txBody>
-      </p:sp>
-      <p:sp>
-        <p:nvSpPr>
-          <p:cNvPr id="40" name="C1-E24 text 38" descr="sci-ppt:o038"/>
-          <p:cNvSpPr txBox="1"/>
-          <p:nvPr/>
-        </p:nvSpPr>
-        <p:spPr>
-          <a:xfrm>
-            <a:off x="640080" y="2395728"/>
-            <a:ext cx="6400800" cy="231648"/>
-          </a:xfrm>
-          <a:prstGeom prst="rect">
-            <a:avLst/>
-          </a:prstGeom>
-          <a:noFill/>
-          <a:effectLst/>
-        </p:spPr>
-        <p:txBody>
-          <a:bodyPr wrap="none" lIns="18288" rIns="18288" tIns="18288" bIns="18288" anchor="t">
-            <a:spAutoFit/>
-          </a:bodyPr>
-          <a:lstStyle/>
-          <a:p>
-            <a:pPr algn="l">
-              <a:spcAft>
-                <a:spcPts val="0"/>
-              </a:spcAft>
-            </a:pPr>
-            <a:r>
-              <a:rPr sz="1200" b="0" i="0">
-                <a:solidFill>
-                  <a:srgbClr val="E7F0F3"/>
-                </a:solidFill>
-                <a:latin typeface="Arial"/>
-              </a:rPr>
-              <a:t>Π / Π₀</a:t>
-            </a:r>
-          </a:p>
-        </p:txBody>
-      </p:sp>
-      <p:sp>
-        <p:nvSpPr>
-          <p:cNvPr id="41" name="C1-E24 polygon 39" descr="sci-ppt:o039"/>
-          <p:cNvSpPr/>
-          <p:nvPr/>
-        </p:nvSpPr>
-        <p:spPr>
-          <a:xfrm>
-            <a:off x="1188720" y="2951018"/>
-            <a:ext cx="6400800" cy="2078182"/>
-          </a:xfrm>
-          <a:custGeom>
-            <a:avLst/>
-            <a:gdLst/>
-            <a:ahLst/>
-            <a:cxnLst/>
-            <a:rect l="l" t="t" r="r" b="b"/>
-            <a:pathLst>
-              <a:path w="6400800" h="2078182">
-                <a:moveTo>
-                  <a:pt x="0" y="0"/>
-                </a:moveTo>
-                <a:lnTo>
-                  <a:pt x="130628" y="42412"/>
-                </a:lnTo>
-                <a:lnTo>
-                  <a:pt x="261257" y="84823"/>
-                </a:lnTo>
-                <a:lnTo>
-                  <a:pt x="391885" y="127235"/>
-                </a:lnTo>
-                <a:lnTo>
-                  <a:pt x="522514" y="169647"/>
-                </a:lnTo>
-                <a:lnTo>
-                  <a:pt x="653142" y="212059"/>
-                </a:lnTo>
-                <a:lnTo>
-                  <a:pt x="783771" y="254471"/>
-                </a:lnTo>
-                <a:lnTo>
-                  <a:pt x="914400" y="296883"/>
-                </a:lnTo>
-                <a:lnTo>
-                  <a:pt x="1045028" y="339295"/>
-                </a:lnTo>
-                <a:lnTo>
-                  <a:pt x="1175657" y="381707"/>
-                </a:lnTo>
-                <a:lnTo>
-                  <a:pt x="1306285" y="424118"/>
-                </a:lnTo>
-                <a:lnTo>
-                  <a:pt x="1436914" y="466530"/>
-                </a:lnTo>
-                <a:lnTo>
-                  <a:pt x="1567542" y="508942"/>
-                </a:lnTo>
-                <a:lnTo>
-                  <a:pt x="1698171" y="551354"/>
-                </a:lnTo>
-                <a:lnTo>
-                  <a:pt x="1828800" y="593766"/>
-                </a:lnTo>
-                <a:lnTo>
-                  <a:pt x="1959428" y="636178"/>
-                </a:lnTo>
-                <a:lnTo>
-                  <a:pt x="2090057" y="678590"/>
-                </a:lnTo>
-                <a:lnTo>
-                  <a:pt x="2220685" y="721002"/>
-                </a:lnTo>
-                <a:lnTo>
-                  <a:pt x="2351314" y="763413"/>
-                </a:lnTo>
-                <a:lnTo>
-                  <a:pt x="2481942" y="805825"/>
-                </a:lnTo>
-                <a:lnTo>
-                  <a:pt x="2612571" y="848237"/>
-                </a:lnTo>
-                <a:lnTo>
-                  <a:pt x="2743200" y="890649"/>
-                </a:lnTo>
-                <a:lnTo>
-                  <a:pt x="2873828" y="933061"/>
-                </a:lnTo>
-                <a:lnTo>
-                  <a:pt x="3004457" y="975473"/>
-                </a:lnTo>
-                <a:lnTo>
-                  <a:pt x="3135085" y="1017885"/>
-                </a:lnTo>
-                <a:lnTo>
-                  <a:pt x="3265714" y="1060297"/>
-                </a:lnTo>
-                <a:lnTo>
-                  <a:pt x="3396342" y="1102708"/>
-                </a:lnTo>
-                <a:lnTo>
-                  <a:pt x="3526971" y="1145120"/>
-                </a:lnTo>
-                <a:lnTo>
-                  <a:pt x="3657600" y="1187532"/>
-                </a:lnTo>
-                <a:lnTo>
-                  <a:pt x="3788228" y="1229944"/>
-                </a:lnTo>
-                <a:lnTo>
-                  <a:pt x="3918857" y="1272356"/>
-                </a:lnTo>
-                <a:lnTo>
-                  <a:pt x="4049485" y="1314768"/>
-                </a:lnTo>
-                <a:lnTo>
-                  <a:pt x="4180114" y="1357180"/>
-                </a:lnTo>
-                <a:lnTo>
-                  <a:pt x="4310742" y="1399592"/>
-                </a:lnTo>
-                <a:lnTo>
-                  <a:pt x="4441371" y="1442003"/>
-                </a:lnTo>
-                <a:lnTo>
-                  <a:pt x="4572000" y="1484415"/>
-                </a:lnTo>
-                <a:lnTo>
-                  <a:pt x="4702628" y="1526827"/>
-                </a:lnTo>
-                <a:lnTo>
-                  <a:pt x="4833257" y="1569239"/>
-                </a:lnTo>
-                <a:lnTo>
-                  <a:pt x="4963885" y="1611651"/>
-                </a:lnTo>
-                <a:lnTo>
-                  <a:pt x="5094514" y="1654063"/>
-                </a:lnTo>
-                <a:lnTo>
-                  <a:pt x="5225142" y="1696475"/>
-                </a:lnTo>
-                <a:lnTo>
-                  <a:pt x="5355771" y="1738887"/>
-                </a:lnTo>
-                <a:lnTo>
-                  <a:pt x="5486400" y="1781298"/>
-                </a:lnTo>
-                <a:lnTo>
-                  <a:pt x="5617028" y="1823710"/>
-                </a:lnTo>
-                <a:lnTo>
-                  <a:pt x="5747657" y="1866122"/>
-                </a:lnTo>
-                <a:lnTo>
-                  <a:pt x="5878285" y="1908534"/>
-                </a:lnTo>
-                <a:lnTo>
-                  <a:pt x="6008914" y="1950946"/>
-                </a:lnTo>
-                <a:lnTo>
-                  <a:pt x="6139542" y="1993358"/>
-                </a:lnTo>
-                <a:lnTo>
-                  <a:pt x="6270171" y="2035770"/>
-                </a:lnTo>
-                <a:lnTo>
-                  <a:pt x="6400800" y="2078182"/>
-                </a:lnTo>
-              </a:path>
-            </a:pathLst>
-          </a:custGeom>
-          <a:noFill/>
-          <a:ln w="40640">
+          <a:ln w="27940">
             <a:solidFill>
               <a:srgbClr val="F2B880"/>
             </a:solidFill>
           </a:ln>
           <a:effectLst/>
         </p:spPr>
-        <p:txBody>
-          <a:bodyPr rtlCol="0" anchor="ctr"/>
-          <a:lstStyle/>
-          <a:p>
-            <a:pPr algn="ctr"/>
-          </a:p>
-        </p:txBody>
-      </p:sp>
-      <p:sp>
-        <p:nvSpPr>
-          <p:cNvPr id="42" name="C1-E24 ellipse 40" descr="sci-ppt:o040"/>
+      </p:cxnSp>
+      <p:sp>
+        <p:nvSpPr>
+          <p:cNvPr id="28" name="C1-E24 ellipse 26" descr="sci-ppt:o026"/>
           <p:cNvSpPr/>
           <p:nvPr/>
         </p:nvSpPr>
         <p:spPr>
           <a:xfrm>
-            <a:off x="1115568" y="2877866"/>
-            <a:ext cx="146304" cy="146304"/>
+            <a:off x="6031593" y="3026664"/>
+            <a:ext cx="164592" cy="164592"/>
           </a:xfrm>
           <a:prstGeom prst="ellipse">
             <a:avLst/>
@@ -4438,46 +3970,14 @@
       </p:sp>
       <p:sp>
         <p:nvSpPr>
-          <p:cNvPr id="43" name="C1-E24 ellipse 41" descr="sci-ppt:o041"/>
-          <p:cNvSpPr/>
-          <p:nvPr/>
-        </p:nvSpPr>
-        <p:spPr>
-          <a:xfrm>
-            <a:off x="7516368" y="4956048"/>
-            <a:ext cx="146304" cy="146304"/>
-          </a:xfrm>
-          <a:prstGeom prst="ellipse">
-            <a:avLst/>
-          </a:prstGeom>
-          <a:solidFill>
-            <a:srgbClr val="8EDBD4"/>
-          </a:solidFill>
-          <a:ln w="12700">
-            <a:solidFill>
-              <a:srgbClr val="8EDBD4"/>
-            </a:solidFill>
-          </a:ln>
-          <a:effectLst/>
-        </p:spPr>
-        <p:txBody>
-          <a:bodyPr rtlCol="0" anchor="ctr"/>
-          <a:lstStyle/>
-          <a:p>
-            <a:pPr algn="ctr"/>
-          </a:p>
-        </p:txBody>
-      </p:sp>
-      <p:sp>
-        <p:nvSpPr>
-          <p:cNvPr id="44" name="C1-E24 text 42" descr="sci-ppt:o042"/>
+          <p:cNvPr id="29" name="C1-E24 text 27" descr="sci-ppt:o027"/>
           <p:cNvSpPr txBox="1"/>
           <p:nvPr/>
         </p:nvSpPr>
         <p:spPr>
           <a:xfrm>
-            <a:off x="3566160" y="3441469"/>
-            <a:ext cx="2743200" cy="247142"/>
+            <a:off x="5016609" y="2148840"/>
+            <a:ext cx="2194560" cy="417576"/>
           </a:xfrm>
           <a:prstGeom prst="rect">
             <a:avLst/>
@@ -4491,33 +3991,199 @@
           </a:bodyPr>
           <a:lstStyle/>
           <a:p>
+            <a:pPr algn="ctr">
+              <a:spcAft>
+                <a:spcPts val="0"/>
+              </a:spcAft>
+            </a:pPr>
+            <a:r>
+              <a:rPr sz="1200" b="1" i="0">
+                <a:solidFill>
+                  <a:srgbClr val="F2B880"/>
+                </a:solidFill>
+                <a:latin typeface="Arial"/>
+              </a:rPr>
+              <a:t>convective time</a:t>
+            </a:r>
+          </a:p>
+          <a:p>
+            <a:pPr algn="ctr">
+              <a:spcAft>
+                <a:spcPts val="0"/>
+              </a:spcAft>
+            </a:pPr>
+            <a:r>
+              <a:rPr sz="1200" b="1" i="0">
+                <a:solidFill>
+                  <a:srgbClr val="F2B880"/>
+                </a:solidFill>
+                <a:latin typeface="Arial"/>
+              </a:rPr>
+              <a:t>L/U = 33 µs</a:t>
+            </a:r>
+          </a:p>
+        </p:txBody>
+      </p:sp>
+      <p:cxnSp>
+        <p:nvCxnSpPr>
+          <p:cNvPr id="30" name="C1-E24 line 28" descr="sci-ppt:o028"/>
+          <p:cNvCxnSpPr/>
+          <p:nvPr/>
+        </p:nvCxnSpPr>
+        <p:spPr>
+          <a:xfrm flipV="1">
+            <a:off x="9771017" y="2103120"/>
+            <a:ext cx="0" cy="1005840"/>
+          </a:xfrm>
+          <a:prstGeom prst="line">
+            <a:avLst/>
+          </a:prstGeom>
+          <a:ln w="27940">
+            <a:solidFill>
+              <a:srgbClr val="F28BA0"/>
+            </a:solidFill>
+          </a:ln>
+          <a:effectLst/>
+        </p:spPr>
+      </p:cxnSp>
+      <p:sp>
+        <p:nvSpPr>
+          <p:cNvPr id="31" name="C1-E24 ellipse 29" descr="sci-ppt:o029"/>
+          <p:cNvSpPr/>
+          <p:nvPr/>
+        </p:nvSpPr>
+        <p:spPr>
+          <a:xfrm>
+            <a:off x="9688721" y="3026664"/>
+            <a:ext cx="164592" cy="164592"/>
+          </a:xfrm>
+          <a:prstGeom prst="ellipse">
+            <a:avLst/>
+          </a:prstGeom>
+          <a:solidFill>
+            <a:srgbClr val="F28BA0"/>
+          </a:solidFill>
+          <a:ln w="12700">
+            <a:solidFill>
+              <a:srgbClr val="F28BA0"/>
+            </a:solidFill>
+          </a:ln>
+          <a:effectLst/>
+        </p:spPr>
+        <p:txBody>
+          <a:bodyPr rtlCol="0" anchor="ctr"/>
+          <a:lstStyle/>
+          <a:p>
+            <a:pPr algn="ctr"/>
+          </a:p>
+        </p:txBody>
+      </p:sp>
+      <p:sp>
+        <p:nvSpPr>
+          <p:cNvPr id="32" name="C1-E24 text 30" descr="sci-ppt:o030"/>
+          <p:cNvSpPr txBox="1"/>
+          <p:nvPr/>
+        </p:nvSpPr>
+        <p:spPr>
+          <a:xfrm>
+            <a:off x="8673737" y="1417320"/>
+            <a:ext cx="2194560" cy="417576"/>
+          </a:xfrm>
+          <a:prstGeom prst="rect">
+            <a:avLst/>
+          </a:prstGeom>
+          <a:noFill/>
+          <a:effectLst/>
+        </p:spPr>
+        <p:txBody>
+          <a:bodyPr wrap="none" lIns="18288" rIns="18288" tIns="18288" bIns="18288" anchor="t">
+            <a:spAutoFit/>
+          </a:bodyPr>
+          <a:lstStyle/>
+          <a:p>
+            <a:pPr algn="ctr">
+              <a:spcAft>
+                <a:spcPts val="0"/>
+              </a:spcAft>
+            </a:pPr>
+            <a:r>
+              <a:rPr sz="1200" b="1" i="0">
+                <a:solidFill>
+                  <a:srgbClr val="F28BA0"/>
+                </a:solidFill>
+                <a:latin typeface="Arial"/>
+              </a:rPr>
+              <a:t>viscous time</a:t>
+            </a:r>
+          </a:p>
+          <a:p>
+            <a:pPr algn="ctr">
+              <a:spcAft>
+                <a:spcPts val="0"/>
+              </a:spcAft>
+            </a:pPr>
+            <a:r>
+              <a:rPr sz="1200" b="1" i="0">
+                <a:solidFill>
+                  <a:srgbClr val="F28BA0"/>
+                </a:solidFill>
+                <a:latin typeface="Arial"/>
+              </a:rPr>
+              <a:t>L²/ν = 10 ms</a:t>
+            </a:r>
+          </a:p>
+        </p:txBody>
+      </p:sp>
+      <p:sp>
+        <p:nvSpPr>
+          <p:cNvPr id="33" name="C1-E24 text 31" descr="sci-ppt:o031"/>
+          <p:cNvSpPr txBox="1"/>
+          <p:nvPr/>
+        </p:nvSpPr>
+        <p:spPr>
+          <a:xfrm>
+            <a:off x="914400" y="3749039"/>
+            <a:ext cx="10332720" cy="254889"/>
+          </a:xfrm>
+          <a:prstGeom prst="rect">
+            <a:avLst/>
+          </a:prstGeom>
+          <a:noFill/>
+          <a:effectLst/>
+        </p:spPr>
+        <p:txBody>
+          <a:bodyPr wrap="none" lIns="18288" rIns="18288" tIns="18288" bIns="18288" anchor="t">
+            <a:spAutoFit/>
+          </a:bodyPr>
+          <a:lstStyle/>
+          <a:p>
             <a:pPr algn="l">
               <a:spcAft>
                 <a:spcPts val="0"/>
               </a:spcAft>
             </a:pPr>
             <a:r>
-              <a:rPr sz="1300" b="0" i="0">
-                <a:solidFill>
-                  <a:srgbClr val="F2B880"/>
+              <a:rPr sz="1350" b="1" i="0">
+                <a:solidFill>
+                  <a:srgbClr val="8EDBD4"/>
                 </a:solidFill>
                 <a:latin typeface="Arial"/>
               </a:rPr>
-              <a:t>Π(z) = Π₀(1 − z/L)</a:t>
-            </a:r>
-          </a:p>
-        </p:txBody>
-      </p:sp>
-      <p:sp>
-        <p:nvSpPr>
-          <p:cNvPr id="45" name="C1-E24 round_rect 43" descr="sci-ppt:o043"/>
+              <a:t>Ratios of the declared case</a:t>
+            </a:r>
+          </a:p>
+        </p:txBody>
+      </p:sp>
+      <p:sp>
+        <p:nvSpPr>
+          <p:cNvPr id="34" name="C1-E24 round_rect 32" descr="sci-ppt:o032"/>
           <p:cNvSpPr/>
           <p:nvPr/>
         </p:nvSpPr>
         <p:spPr>
           <a:xfrm>
-            <a:off x="8138160" y="1097280"/>
-            <a:ext cx="3703320" cy="4206240"/>
+            <a:off x="914400" y="4114800"/>
+            <a:ext cx="3291840" cy="1417320"/>
           </a:xfrm>
           <a:prstGeom prst="roundRect">
             <a:avLst/>
@@ -4527,7 +4193,7 @@
           </a:solidFill>
           <a:ln w="20320">
             <a:solidFill>
-              <a:srgbClr val="8EDBD4"/>
+              <a:srgbClr val="F2B880"/>
             </a:solidFill>
           </a:ln>
           <a:effectLst/>
@@ -4542,14 +4208,14 @@
       </p:sp>
       <p:sp>
         <p:nvSpPr>
-          <p:cNvPr id="46" name="C1-E24 text 44" descr="sci-ppt:o044"/>
+          <p:cNvPr id="35" name="C1-E24 text 33" descr="sci-ppt:o033"/>
           <p:cNvSpPr txBox="1"/>
           <p:nvPr/>
         </p:nvSpPr>
         <p:spPr>
           <a:xfrm>
-            <a:off x="8247888" y="1152144"/>
-            <a:ext cx="3483863" cy="254889"/>
+            <a:off x="1005840" y="4187952"/>
+            <a:ext cx="3108960" cy="278130"/>
           </a:xfrm>
           <a:prstGeom prst="rect">
             <a:avLst/>
@@ -4563,33 +4229,385 @@
           </a:bodyPr>
           <a:lstStyle/>
           <a:p>
+            <a:pPr algn="ctr">
+              <a:spcAft>
+                <a:spcPts val="0"/>
+              </a:spcAft>
+            </a:pPr>
+            <a:r>
+              <a:rPr sz="1500" b="1" i="0">
+                <a:solidFill>
+                  <a:srgbClr val="F2B880"/>
+                </a:solidFill>
+                <a:latin typeface="Arial"/>
+              </a:rPr>
+              <a:t>Uτ/L = 0.015</a:t>
+            </a:r>
+          </a:p>
+        </p:txBody>
+      </p:sp>
+      <p:sp>
+        <p:nvSpPr>
+          <p:cNvPr id="36" name="C1-E24 text 34" descr="sci-ppt:o034"/>
+          <p:cNvSpPr txBox="1"/>
+          <p:nvPr/>
+        </p:nvSpPr>
+        <p:spPr>
+          <a:xfrm>
+            <a:off x="1005840" y="4617720"/>
+            <a:ext cx="3108960" cy="231648"/>
+          </a:xfrm>
+          <a:prstGeom prst="rect">
+            <a:avLst/>
+          </a:prstGeom>
+          <a:noFill/>
+          <a:effectLst/>
+        </p:spPr>
+        <p:txBody>
+          <a:bodyPr wrap="none" lIns="18288" rIns="18288" tIns="18288" bIns="18288" anchor="t">
+            <a:spAutoFit/>
+          </a:bodyPr>
+          <a:lstStyle/>
+          <a:p>
+            <a:pPr algn="ctr">
+              <a:spcAft>
+                <a:spcPts val="0"/>
+              </a:spcAft>
+            </a:pPr>
+            <a:r>
+              <a:rPr sz="1200" b="0" i="0">
+                <a:solidFill>
+                  <a:srgbClr val="E7F0F3"/>
+                </a:solidFill>
+                <a:latin typeface="Arial"/>
+              </a:rPr>
+              <a:t>τ ≪ convective time ✓</a:t>
+            </a:r>
+          </a:p>
+        </p:txBody>
+      </p:sp>
+      <p:sp>
+        <p:nvSpPr>
+          <p:cNvPr id="37" name="C1-E24 round_rect 35" descr="sci-ppt:o035"/>
+          <p:cNvSpPr/>
+          <p:nvPr/>
+        </p:nvSpPr>
+        <p:spPr>
+          <a:xfrm>
+            <a:off x="4434840" y="4114800"/>
+            <a:ext cx="3291840" cy="1417320"/>
+          </a:xfrm>
+          <a:prstGeom prst="roundRect">
+            <a:avLst/>
+          </a:prstGeom>
+          <a:solidFill>
+            <a:srgbClr val="213E4B"/>
+          </a:solidFill>
+          <a:ln w="20320">
+            <a:solidFill>
+              <a:srgbClr val="F28BA0"/>
+            </a:solidFill>
+          </a:ln>
+          <a:effectLst/>
+        </p:spPr>
+        <p:txBody>
+          <a:bodyPr rtlCol="0" anchor="ctr"/>
+          <a:lstStyle/>
+          <a:p>
+            <a:pPr algn="ctr"/>
+          </a:p>
+        </p:txBody>
+      </p:sp>
+      <p:sp>
+        <p:nvSpPr>
+          <p:cNvPr id="38" name="C1-E24 text 36" descr="sci-ppt:o036"/>
+          <p:cNvSpPr txBox="1"/>
+          <p:nvPr/>
+        </p:nvSpPr>
+        <p:spPr>
+          <a:xfrm>
+            <a:off x="4526279" y="4187952"/>
+            <a:ext cx="3108960" cy="278130"/>
+          </a:xfrm>
+          <a:prstGeom prst="rect">
+            <a:avLst/>
+          </a:prstGeom>
+          <a:noFill/>
+          <a:effectLst/>
+        </p:spPr>
+        <p:txBody>
+          <a:bodyPr wrap="none" lIns="18288" rIns="18288" tIns="18288" bIns="18288" anchor="t">
+            <a:spAutoFit/>
+          </a:bodyPr>
+          <a:lstStyle/>
+          <a:p>
+            <a:pPr algn="ctr">
+              <a:spcAft>
+                <a:spcPts val="0"/>
+              </a:spcAft>
+            </a:pPr>
+            <a:r>
+              <a:rPr sz="1500" b="1" i="0">
+                <a:solidFill>
+                  <a:srgbClr val="F28BA0"/>
+                </a:solidFill>
+                <a:latin typeface="Arial"/>
+              </a:rPr>
+              <a:t>ντ/L² = 5×10⁻⁵</a:t>
+            </a:r>
+          </a:p>
+        </p:txBody>
+      </p:sp>
+      <p:sp>
+        <p:nvSpPr>
+          <p:cNvPr id="39" name="C1-E24 text 37" descr="sci-ppt:o037"/>
+          <p:cNvSpPr txBox="1"/>
+          <p:nvPr/>
+        </p:nvSpPr>
+        <p:spPr>
+          <a:xfrm>
+            <a:off x="4526279" y="4617720"/>
+            <a:ext cx="3108960" cy="231648"/>
+          </a:xfrm>
+          <a:prstGeom prst="rect">
+            <a:avLst/>
+          </a:prstGeom>
+          <a:noFill/>
+          <a:effectLst/>
+        </p:spPr>
+        <p:txBody>
+          <a:bodyPr wrap="none" lIns="18288" rIns="18288" tIns="18288" bIns="18288" anchor="t">
+            <a:spAutoFit/>
+          </a:bodyPr>
+          <a:lstStyle/>
+          <a:p>
+            <a:pPr algn="ctr">
+              <a:spcAft>
+                <a:spcPts val="0"/>
+              </a:spcAft>
+            </a:pPr>
+            <a:r>
+              <a:rPr sz="1200" b="0" i="0">
+                <a:solidFill>
+                  <a:srgbClr val="E7F0F3"/>
+                </a:solidFill>
+                <a:latin typeface="Arial"/>
+              </a:rPr>
+              <a:t>τ ≪ viscous time ✓</a:t>
+            </a:r>
+          </a:p>
+        </p:txBody>
+      </p:sp>
+      <p:sp>
+        <p:nvSpPr>
+          <p:cNvPr id="40" name="C1-E24 round_rect 38" descr="sci-ppt:o038"/>
+          <p:cNvSpPr/>
+          <p:nvPr/>
+        </p:nvSpPr>
+        <p:spPr>
+          <a:xfrm>
+            <a:off x="7955279" y="4114800"/>
+            <a:ext cx="3291840" cy="1417320"/>
+          </a:xfrm>
+          <a:prstGeom prst="roundRect">
+            <a:avLst/>
+          </a:prstGeom>
+          <a:solidFill>
+            <a:srgbClr val="213E4B"/>
+          </a:solidFill>
+          <a:ln w="20320">
+            <a:solidFill>
+              <a:srgbClr val="7FC8F8"/>
+            </a:solidFill>
+          </a:ln>
+          <a:effectLst/>
+        </p:spPr>
+        <p:txBody>
+          <a:bodyPr rtlCol="0" anchor="ctr"/>
+          <a:lstStyle/>
+          <a:p>
+            <a:pPr algn="ctr"/>
+          </a:p>
+        </p:txBody>
+      </p:sp>
+      <p:sp>
+        <p:nvSpPr>
+          <p:cNvPr id="41" name="C1-E24 text 39" descr="sci-ppt:o039"/>
+          <p:cNvSpPr txBox="1"/>
+          <p:nvPr/>
+        </p:nvSpPr>
+        <p:spPr>
+          <a:xfrm>
+            <a:off x="8046719" y="4187952"/>
+            <a:ext cx="3108960" cy="278130"/>
+          </a:xfrm>
+          <a:prstGeom prst="rect">
+            <a:avLst/>
+          </a:prstGeom>
+          <a:noFill/>
+          <a:effectLst/>
+        </p:spPr>
+        <p:txBody>
+          <a:bodyPr wrap="none" lIns="18288" rIns="18288" tIns="18288" bIns="18288" anchor="t">
+            <a:spAutoFit/>
+          </a:bodyPr>
+          <a:lstStyle/>
+          <a:p>
+            <a:pPr algn="ctr">
+              <a:spcAft>
+                <a:spcPts val="0"/>
+              </a:spcAft>
+            </a:pPr>
+            <a:r>
+              <a:rPr sz="1500" b="1" i="0">
+                <a:solidFill>
+                  <a:srgbClr val="7FC8F8"/>
+                </a:solidFill>
+                <a:latin typeface="Arial"/>
+              </a:rPr>
+              <a:t>τ / tₐ = 7.5</a:t>
+            </a:r>
+          </a:p>
+        </p:txBody>
+      </p:sp>
+      <p:sp>
+        <p:nvSpPr>
+          <p:cNvPr id="42" name="C1-E24 text 40" descr="sci-ppt:o040"/>
+          <p:cNvSpPr txBox="1"/>
+          <p:nvPr/>
+        </p:nvSpPr>
+        <p:spPr>
+          <a:xfrm>
+            <a:off x="8046719" y="4617720"/>
+            <a:ext cx="3108960" cy="603504"/>
+          </a:xfrm>
+          <a:prstGeom prst="rect">
+            <a:avLst/>
+          </a:prstGeom>
+          <a:noFill/>
+          <a:effectLst/>
+        </p:spPr>
+        <p:txBody>
+          <a:bodyPr wrap="none" lIns="18288" rIns="18288" tIns="18288" bIns="18288" anchor="t">
+            <a:spAutoFit/>
+          </a:bodyPr>
+          <a:lstStyle/>
+          <a:p>
+            <a:pPr algn="ctr">
+              <a:spcAft>
+                <a:spcPts val="0"/>
+              </a:spcAft>
+            </a:pPr>
+            <a:r>
+              <a:rPr sz="1200" b="0" i="0">
+                <a:solidFill>
+                  <a:srgbClr val="E7F0F3"/>
+                </a:solidFill>
+                <a:latin typeface="Arial"/>
+              </a:rPr>
+              <a:t>τ is longer than the acoustic</a:t>
+            </a:r>
+          </a:p>
+          <a:p>
+            <a:pPr algn="ctr">
+              <a:spcAft>
+                <a:spcPts val="0"/>
+              </a:spcAft>
+            </a:pPr>
+            <a:r>
+              <a:rPr sz="1200" b="0" i="0">
+                <a:solidFill>
+                  <a:srgbClr val="E7F0F3"/>
+                </a:solidFill>
+                <a:latin typeface="Arial"/>
+              </a:rPr>
+              <a:t>crossing, so pressure equalises along</a:t>
+            </a:r>
+          </a:p>
+          <a:p>
+            <a:pPr algn="ctr">
+              <a:spcAft>
+                <a:spcPts val="0"/>
+              </a:spcAft>
+            </a:pPr>
+            <a:r>
+              <a:rPr sz="1200" b="0" i="0">
+                <a:solidFill>
+                  <a:srgbClr val="E7F0F3"/>
+                </a:solidFill>
+                <a:latin typeface="Arial"/>
+              </a:rPr>
+              <a:t>the column</a:t>
+            </a:r>
+          </a:p>
+        </p:txBody>
+      </p:sp>
+      <p:sp>
+        <p:nvSpPr>
+          <p:cNvPr id="43" name="C1-E24 text 41" descr="sci-ppt:o041"/>
+          <p:cNvSpPr txBox="1"/>
+          <p:nvPr/>
+        </p:nvSpPr>
+        <p:spPr>
+          <a:xfrm>
+            <a:off x="457200" y="5806440"/>
+            <a:ext cx="11247120" cy="433070"/>
+          </a:xfrm>
+          <a:prstGeom prst="rect">
+            <a:avLst/>
+          </a:prstGeom>
+          <a:noFill/>
+          <a:effectLst/>
+        </p:spPr>
+        <p:txBody>
+          <a:bodyPr wrap="none" lIns="18288" rIns="18288" tIns="18288" bIns="18288" anchor="t">
+            <a:spAutoFit/>
+          </a:bodyPr>
+          <a:lstStyle/>
+          <a:p>
             <a:pPr algn="l">
               <a:spcAft>
                 <a:spcPts val="0"/>
               </a:spcAft>
             </a:pPr>
             <a:r>
-              <a:rPr sz="1350" b="1" i="0">
-                <a:solidFill>
-                  <a:srgbClr val="8EDBD4"/>
+              <a:rPr sz="1250" b="0" i="0">
+                <a:solidFill>
+                  <a:srgbClr val="E7F0F3"/>
                 </a:solidFill>
                 <a:latin typeface="Arial"/>
               </a:rPr>
-              <a:t>Straight column</a:t>
-            </a:r>
-          </a:p>
-        </p:txBody>
-      </p:sp>
-      <p:sp>
-        <p:nvSpPr>
-          <p:cNvPr id="47" name="C1-E24 text 45" descr="sci-ppt:o045"/>
+              <a:t>Pressure impulse (Pa·s) and acoustic time (s) are different quantities: one measures the load delivered, the other how fast pressure</a:t>
+            </a:r>
+          </a:p>
+          <a:p>
+            <a:pPr algn="l">
+              <a:spcAft>
+                <a:spcPts val="0"/>
+              </a:spcAft>
+            </a:pPr>
+            <a:r>
+              <a:rPr sz="1250" b="0" i="0">
+                <a:solidFill>
+                  <a:srgbClr val="E7F0F3"/>
+                </a:solidFill>
+                <a:latin typeface="Arial"/>
+              </a:rPr>
+              <a:t>communicates.</a:t>
+            </a:r>
+          </a:p>
+        </p:txBody>
+      </p:sp>
+      <p:sp>
+        <p:nvSpPr>
+          <p:cNvPr id="44" name="C1-E24 text 42" descr="sci-ppt:o042"/>
           <p:cNvSpPr txBox="1"/>
           <p:nvPr/>
         </p:nvSpPr>
         <p:spPr>
           <a:xfrm>
-            <a:off x="8275320" y="1554480"/>
-            <a:ext cx="3474720" cy="448563"/>
+            <a:off x="320040" y="6510528"/>
+            <a:ext cx="11521440" cy="200660"/>
           </a:xfrm>
           <a:prstGeom prst="rect">
             <a:avLst/>
@@ -4609,317 +4627,13 @@
               </a:spcAft>
             </a:pPr>
             <a:r>
-              <a:rPr sz="1300" b="1" i="0">
-                <a:solidFill>
-                  <a:srgbClr val="E7F0F3"/>
+              <a:rPr sz="1000" b="0" i="0">
+                <a:solidFill>
+                  <a:srgbClr val="B4C7D2"/>
                 </a:solidFill>
                 <a:latin typeface="Arial"/>
               </a:rPr>
-              <a:t>d²Π/dz² = 0</a:t>
-            </a:r>
-          </a:p>
-          <a:p>
-            <a:pPr algn="l">
-              <a:spcAft>
-                <a:spcPts val="0"/>
-              </a:spcAft>
-            </a:pPr>
-            <a:r>
-              <a:rPr sz="1300" b="1" i="0">
-                <a:solidFill>
-                  <a:srgbClr val="E7F0F3"/>
-                </a:solidFill>
-                <a:latin typeface="Arial"/>
-              </a:rPr>
-              <a:t>Π = Π₀ (1 − z/L)</a:t>
-            </a:r>
-          </a:p>
-        </p:txBody>
-      </p:sp>
-      <p:sp>
-        <p:nvSpPr>
-          <p:cNvPr id="48" name="C1-E24 text 46" descr="sci-ppt:o046"/>
-          <p:cNvSpPr txBox="1"/>
-          <p:nvPr/>
-        </p:nvSpPr>
-        <p:spPr>
-          <a:xfrm>
-            <a:off x="8275320" y="2331720"/>
-            <a:ext cx="3474720" cy="247142"/>
-          </a:xfrm>
-          <a:prstGeom prst="rect">
-            <a:avLst/>
-          </a:prstGeom>
-          <a:noFill/>
-          <a:effectLst/>
-        </p:spPr>
-        <p:txBody>
-          <a:bodyPr wrap="none" lIns="18288" rIns="18288" tIns="18288" bIns="18288" anchor="t">
-            <a:spAutoFit/>
-          </a:bodyPr>
-          <a:lstStyle/>
-          <a:p>
-            <a:pPr algn="l">
-              <a:spcAft>
-                <a:spcPts val="0"/>
-              </a:spcAft>
-            </a:pPr>
-            <a:r>
-              <a:rPr sz="1300" b="1" i="0">
-                <a:solidFill>
-                  <a:srgbClr val="8EDBD4"/>
-                </a:solidFill>
-                <a:latin typeface="Arial"/>
-              </a:rPr>
-              <a:t>Δu_z = −(1/ρ) dΠ/dz = Π₀ / (ρL)</a:t>
-            </a:r>
-          </a:p>
-        </p:txBody>
-      </p:sp>
-      <p:sp>
-        <p:nvSpPr>
-          <p:cNvPr id="49" name="C1-E24 text 47" descr="sci-ppt:o047"/>
-          <p:cNvSpPr txBox="1"/>
-          <p:nvPr/>
-        </p:nvSpPr>
-        <p:spPr>
-          <a:xfrm>
-            <a:off x="8275320" y="2926080"/>
-            <a:ext cx="3474720" cy="417576"/>
-          </a:xfrm>
-          <a:prstGeom prst="rect">
-            <a:avLst/>
-          </a:prstGeom>
-          <a:noFill/>
-          <a:effectLst/>
-        </p:spPr>
-        <p:txBody>
-          <a:bodyPr wrap="none" lIns="18288" rIns="18288" tIns="18288" bIns="18288" anchor="t">
-            <a:spAutoFit/>
-          </a:bodyPr>
-          <a:lstStyle/>
-          <a:p>
-            <a:pPr algn="l">
-              <a:spcAft>
-                <a:spcPts val="0"/>
-              </a:spcAft>
-            </a:pPr>
-            <a:r>
-              <a:rPr sz="1200" b="0" i="0">
-                <a:solidFill>
-                  <a:srgbClr val="E7F0F3"/>
-                </a:solidFill>
-                <a:latin typeface="Arial"/>
-              </a:rPr>
-              <a:t>With Π₀ = 0.30 Pa·s, ρ = 1000 kg/m³, L =</a:t>
-            </a:r>
-          </a:p>
-          <a:p>
-            <a:pPr algn="l">
-              <a:spcAft>
-                <a:spcPts val="0"/>
-              </a:spcAft>
-            </a:pPr>
-            <a:r>
-              <a:rPr sz="1200" b="0" i="0">
-                <a:solidFill>
-                  <a:srgbClr val="E7F0F3"/>
-                </a:solidFill>
-                <a:latin typeface="Arial"/>
-              </a:rPr>
-              <a:t>100 µm:</a:t>
-            </a:r>
-          </a:p>
-        </p:txBody>
-      </p:sp>
-      <p:sp>
-        <p:nvSpPr>
-          <p:cNvPr id="50" name="C1-E24 text 48" descr="sci-ppt:o048"/>
-          <p:cNvSpPr txBox="1"/>
-          <p:nvPr/>
-        </p:nvSpPr>
-        <p:spPr>
-          <a:xfrm>
-            <a:off x="8275320" y="3429000"/>
-            <a:ext cx="3474720" cy="309117"/>
-          </a:xfrm>
-          <a:prstGeom prst="rect">
-            <a:avLst/>
-          </a:prstGeom>
-          <a:noFill/>
-          <a:effectLst/>
-        </p:spPr>
-        <p:txBody>
-          <a:bodyPr wrap="none" lIns="18288" rIns="18288" tIns="18288" bIns="18288" anchor="t">
-            <a:spAutoFit/>
-          </a:bodyPr>
-          <a:lstStyle/>
-          <a:p>
-            <a:pPr algn="l">
-              <a:spcAft>
-                <a:spcPts val="0"/>
-              </a:spcAft>
-            </a:pPr>
-            <a:r>
-              <a:rPr sz="1700" b="1" i="0">
-                <a:solidFill>
-                  <a:srgbClr val="F2B880"/>
-                </a:solidFill>
-                <a:latin typeface="Arial"/>
-              </a:rPr>
-              <a:t>Δu_z = 3.0 m/s</a:t>
-            </a:r>
-          </a:p>
-        </p:txBody>
-      </p:sp>
-      <p:sp>
-        <p:nvSpPr>
-          <p:cNvPr id="51" name="C1-E24 text 49" descr="sci-ppt:o049"/>
-          <p:cNvSpPr txBox="1"/>
-          <p:nvPr/>
-        </p:nvSpPr>
-        <p:spPr>
-          <a:xfrm>
-            <a:off x="8275320" y="4023360"/>
-            <a:ext cx="3474720" cy="603504"/>
-          </a:xfrm>
-          <a:prstGeom prst="rect">
-            <a:avLst/>
-          </a:prstGeom>
-          <a:noFill/>
-          <a:effectLst/>
-        </p:spPr>
-        <p:txBody>
-          <a:bodyPr wrap="none" lIns="18288" rIns="18288" tIns="18288" bIns="18288" anchor="t">
-            <a:spAutoFit/>
-          </a:bodyPr>
-          <a:lstStyle/>
-          <a:p>
-            <a:pPr algn="l">
-              <a:spcAft>
-                <a:spcPts val="0"/>
-              </a:spcAft>
-            </a:pPr>
-            <a:r>
-              <a:rPr sz="1200" b="0" i="0">
-                <a:solidFill>
-                  <a:srgbClr val="B4C7D2"/>
-                </a:solidFill>
-                <a:latin typeface="Arial"/>
-              </a:rPr>
-              <a:t>The impulse drops linearly, so every slice</a:t>
-            </a:r>
-          </a:p>
-          <a:p>
-            <a:pPr algn="l">
-              <a:spcAft>
-                <a:spcPts val="0"/>
-              </a:spcAft>
-            </a:pPr>
-            <a:r>
-              <a:rPr sz="1200" b="0" i="0">
-                <a:solidFill>
-                  <a:srgbClr val="B4C7D2"/>
-                </a:solidFill>
-                <a:latin typeface="Arial"/>
-              </a:rPr>
-              <a:t>gets the same velocity change toward the</a:t>
-            </a:r>
-          </a:p>
-          <a:p>
-            <a:pPr algn="l">
-              <a:spcAft>
-                <a:spcPts val="0"/>
-              </a:spcAft>
-            </a:pPr>
-            <a:r>
-              <a:rPr sz="1200" b="0" i="0">
-                <a:solidFill>
-                  <a:srgbClr val="B4C7D2"/>
-                </a:solidFill>
-                <a:latin typeface="Arial"/>
-              </a:rPr>
-              <a:t>outlet.</a:t>
-            </a:r>
-          </a:p>
-        </p:txBody>
-      </p:sp>
-      <p:sp>
-        <p:nvSpPr>
-          <p:cNvPr id="52" name="C1-E24 text 50" descr="sci-ppt:o050"/>
-          <p:cNvSpPr txBox="1"/>
-          <p:nvPr/>
-        </p:nvSpPr>
-        <p:spPr>
-          <a:xfrm>
-            <a:off x="457200" y="5669280"/>
-            <a:ext cx="11338560" cy="254889"/>
-          </a:xfrm>
-          <a:prstGeom prst="rect">
-            <a:avLst/>
-          </a:prstGeom>
-          <a:noFill/>
-          <a:effectLst/>
-        </p:spPr>
-        <p:txBody>
-          <a:bodyPr wrap="none" lIns="18288" rIns="18288" tIns="18288" bIns="18288" anchor="t">
-            <a:spAutoFit/>
-          </a:bodyPr>
-          <a:lstStyle/>
-          <a:p>
-            <a:pPr algn="l">
-              <a:spcAft>
-                <a:spcPts val="0"/>
-              </a:spcAft>
-            </a:pPr>
-            <a:r>
-              <a:rPr sz="1350" b="0" i="0">
-                <a:solidFill>
-                  <a:srgbClr val="E7F0F3"/>
-                </a:solidFill>
-                <a:latin typeface="Arial"/>
-              </a:rPr>
-              <a:t>A constant gradient means uniform acceleration: the whole column leaves the driven end as one plug.</a:t>
-            </a:r>
-          </a:p>
-        </p:txBody>
-      </p:sp>
-      <p:sp>
-        <p:nvSpPr>
-          <p:cNvPr id="53" name="C1-E24 text 51" descr="sci-ppt:o051"/>
-          <p:cNvSpPr txBox="1"/>
-          <p:nvPr/>
-        </p:nvSpPr>
-        <p:spPr>
-          <a:xfrm>
-            <a:off x="320040" y="6510528"/>
-            <a:ext cx="11521440" cy="200660"/>
-          </a:xfrm>
-          <a:prstGeom prst="rect">
-            <a:avLst/>
-          </a:prstGeom>
-          <a:noFill/>
-          <a:effectLst/>
-        </p:spPr>
-        <p:txBody>
-          <a:bodyPr wrap="none" lIns="18288" rIns="18288" tIns="18288" bIns="18288" anchor="t">
-            <a:spAutoFit/>
-          </a:bodyPr>
-          <a:lstStyle/>
-          <a:p>
-            <a:pPr algn="l">
-              <a:spcAft>
-                <a:spcPts val="0"/>
-              </a:spcAft>
-            </a:pPr>
-            <a:r>
-              <a:rPr sz="1000" b="0" i="0">
-                <a:solidFill>
-                  <a:srgbClr val="B4C7D2"/>
-                </a:solidFill>
-                <a:latin typeface="Arial"/>
-              </a:rPr>
-              <a:t>Boundary values Π(0) = Π₀, Π(L) = 0 (Eq. C1-E24).</a:t>
+              <a:t>Π₀ = Δpτ = 0.60 MPa × 0.50 µs = 0.30 Pa·s; U = 3.0 m/s; c = 1500 m/s; L = 100 µm; ν = 10⁻⁶ m²/s.</a:t>
             </a:r>
           </a:p>
         </p:txBody>
